--- a/Introduction_to_Reading_Assessment.pptx
+++ b/Introduction_to_Reading_Assessment.pptx
@@ -11,7 +11,6 @@
     <p:sldId id="259" r:id="rId10"/>
     <p:sldId id="260" r:id="rId11"/>
     <p:sldId id="261" r:id="rId12"/>
-    <p:sldId id="262" r:id="rId13"/>
   </p:sldIdLst>
   <p:sldSz cx="12192000" cy="6858000" type="screen4x3"/>
   <p:notesSz cx="6858000" cy="9144000"/>
@@ -3203,7 +3202,7 @@
           <a:p>
             <a:pPr algn="l"/>
             <a:r>
-              <a:rPr sz="2400" b="1">
+              <a:rPr b="1" sz="2400">
                 <a:solidFill>
                   <a:srgbClr val="FFFFFF"/>
                 </a:solidFill>
@@ -3345,7 +3344,7 @@
                   <a:srgbClr val="000000"/>
                 </a:solidFill>
               </a:rPr>
-              <a:t>What is an abstract?</a:t>
+              <a:t>What is an Abstract?</a:t>
             </a:r>
           </a:p>
         </p:txBody>
@@ -3358,272 +3357,10 @@
         </p:nvSpPr>
         <p:spPr>
           <a:xfrm>
-            <a:off x="1371600" y="1463040"/>
-            <a:ext cx="3291840" cy="1097280"/>
+            <a:off x="1249680" y="1645920"/>
+            <a:ext cx="2926080" cy="2560320"/>
           </a:xfrm>
           <a:prstGeom prst="roundRect">
-            <a:avLst/>
-          </a:prstGeom>
-          <a:solidFill>
-            <a:srgbClr val="F5F0FA"/>
-          </a:solidFill>
-          <a:ln w="12700">
-            <a:solidFill>
-              <a:srgbClr val="502379"/>
-            </a:solidFill>
-          </a:ln>
-        </p:spPr>
-        <p:style>
-          <a:lnRef idx="1">
-            <a:schemeClr val="accent1"/>
-          </a:lnRef>
-          <a:fillRef idx="3">
-            <a:schemeClr val="accent1"/>
-          </a:fillRef>
-          <a:effectRef idx="2">
-            <a:schemeClr val="accent1"/>
-          </a:effectRef>
-          <a:fontRef idx="minor">
-            <a:schemeClr val="lt1"/>
-          </a:fontRef>
-        </p:style>
-        <p:txBody>
-          <a:bodyPr rtlCol="0" anchor="ctr" wrap="square"/>
-          <a:lstStyle/>
-          <a:p>
-            <a:pPr algn="ctr"/>
-            <a:r>
-              <a:rPr sz="1600" b="1">
-                <a:solidFill>
-                  <a:srgbClr val="000000"/>
-                </a:solidFill>
-              </a:rPr>
-              <a:t>Research</a:t>
-            </a:r>
-            <a:br/>
-            <a:r>
-              <a:rPr sz="1600" b="1">
-                <a:solidFill>
-                  <a:srgbClr val="000000"/>
-                </a:solidFill>
-              </a:rPr>
-              <a:t>Paper</a:t>
-            </a:r>
-          </a:p>
-        </p:txBody>
-      </p:sp>
-      <p:cxnSp>
-        <p:nvCxnSpPr>
-          <p:cNvPr id="5" name="Connector 4"/>
-          <p:cNvCxnSpPr/>
-          <p:nvPr/>
-        </p:nvCxnSpPr>
-        <p:spPr>
-          <a:xfrm>
-            <a:off x="4663440" y="2003040"/>
-            <a:ext cx="1554480" cy="0"/>
-          </a:xfrm>
-          <a:prstGeom prst="line">
-            <a:avLst/>
-          </a:prstGeom>
-          <a:ln w="27432">
-            <a:solidFill>
-              <a:srgbClr val="7C3A9E"/>
-            </a:solidFill>
-            <a:tailEnd type="triangle" w="med" len="med"/>
-          </a:ln>
-        </p:spPr>
-        <p:style>
-          <a:lnRef idx="2">
-            <a:schemeClr val="accent1"/>
-          </a:lnRef>
-          <a:fillRef idx="0">
-            <a:schemeClr val="accent1"/>
-          </a:fillRef>
-          <a:effectRef idx="1">
-            <a:schemeClr val="accent1"/>
-          </a:effectRef>
-          <a:fontRef idx="minor">
-            <a:schemeClr val="tx1"/>
-          </a:fontRef>
-        </p:style>
-      </p:cxnSp>
-      <p:sp>
-        <p:nvSpPr>
-          <p:cNvPr id="6" name="Rounded Rectangle 5"/>
-          <p:cNvSpPr/>
-          <p:nvPr/>
-        </p:nvSpPr>
-        <p:spPr>
-          <a:xfrm>
-            <a:off x="6217920" y="1463040"/>
-            <a:ext cx="3291840" cy="1097280"/>
-          </a:xfrm>
-          <a:prstGeom prst="roundRect">
-            <a:avLst/>
-          </a:prstGeom>
-          <a:solidFill>
-            <a:srgbClr val="7C3A9E"/>
-          </a:solidFill>
-          <a:ln w="12700">
-            <a:solidFill>
-              <a:srgbClr val="7C3A9E"/>
-            </a:solidFill>
-          </a:ln>
-        </p:spPr>
-        <p:style>
-          <a:lnRef idx="1">
-            <a:schemeClr val="accent1"/>
-          </a:lnRef>
-          <a:fillRef idx="3">
-            <a:schemeClr val="accent1"/>
-          </a:fillRef>
-          <a:effectRef idx="2">
-            <a:schemeClr val="accent1"/>
-          </a:effectRef>
-          <a:fontRef idx="minor">
-            <a:schemeClr val="lt1"/>
-          </a:fontRef>
-        </p:style>
-        <p:txBody>
-          <a:bodyPr rtlCol="0" anchor="ctr" wrap="square"/>
-          <a:lstStyle/>
-          <a:p>
-            <a:pPr algn="ctr"/>
-            <a:r>
-              <a:rPr sz="1600" b="1">
-                <a:solidFill>
-                  <a:srgbClr val="FFFFFF"/>
-                </a:solidFill>
-              </a:rPr>
-              <a:t>Abstract</a:t>
-            </a:r>
-            <a:br/>
-            <a:r>
-              <a:rPr sz="1600" b="1">
-                <a:solidFill>
-                  <a:srgbClr val="FFFFFF"/>
-                </a:solidFill>
-              </a:rPr>
-              <a:t>= Miniature</a:t>
-            </a:r>
-          </a:p>
-        </p:txBody>
-      </p:sp>
-      <p:sp>
-        <p:nvSpPr>
-          <p:cNvPr id="7" name="TextBox 6"/>
-          <p:cNvSpPr txBox="1"/>
-          <p:nvPr/>
-        </p:nvSpPr>
-        <p:spPr>
-          <a:xfrm>
-            <a:off x="1371600" y="3108960"/>
-            <a:ext cx="9418320" cy="365760"/>
-          </a:xfrm>
-          <a:prstGeom prst="rect">
-            <a:avLst/>
-          </a:prstGeom>
-          <a:noFill/>
-        </p:spPr>
-        <p:txBody>
-          <a:bodyPr wrap="square">
-            <a:spAutoFit/>
-          </a:bodyPr>
-          <a:lstStyle/>
-          <a:p>
-            <a:pPr algn="l"/>
-            <a:r>
-              <a:rPr sz="1600" b="1">
-                <a:solidFill>
-                  <a:srgbClr val="000000"/>
-                </a:solidFill>
-              </a:rPr>
-              <a:t>●  100–200 words, stands alone</a:t>
-            </a:r>
-          </a:p>
-        </p:txBody>
-      </p:sp>
-      <p:sp>
-        <p:nvSpPr>
-          <p:cNvPr id="8" name="TextBox 7"/>
-          <p:cNvSpPr txBox="1"/>
-          <p:nvPr/>
-        </p:nvSpPr>
-        <p:spPr>
-          <a:xfrm>
-            <a:off x="1371600" y="3474720"/>
-            <a:ext cx="9418320" cy="365760"/>
-          </a:xfrm>
-          <a:prstGeom prst="rect">
-            <a:avLst/>
-          </a:prstGeom>
-          <a:noFill/>
-        </p:spPr>
-        <p:txBody>
-          <a:bodyPr wrap="square">
-            <a:spAutoFit/>
-          </a:bodyPr>
-          <a:lstStyle/>
-          <a:p>
-            <a:pPr algn="l"/>
-            <a:r>
-              <a:rPr sz="1600" b="1">
-                <a:solidFill>
-                  <a:srgbClr val="000000"/>
-                </a:solidFill>
-              </a:rPr>
-              <a:t>●  No uncommon abbreviations</a:t>
-            </a:r>
-          </a:p>
-        </p:txBody>
-      </p:sp>
-      <p:sp>
-        <p:nvSpPr>
-          <p:cNvPr id="9" name="TextBox 8"/>
-          <p:cNvSpPr txBox="1"/>
-          <p:nvPr/>
-        </p:nvSpPr>
-        <p:spPr>
-          <a:xfrm>
-            <a:off x="1371600" y="3840480"/>
-            <a:ext cx="9418320" cy="365760"/>
-          </a:xfrm>
-          <a:prstGeom prst="rect">
-            <a:avLst/>
-          </a:prstGeom>
-          <a:noFill/>
-        </p:spPr>
-        <p:txBody>
-          <a:bodyPr wrap="square">
-            <a:spAutoFit/>
-          </a:bodyPr>
-          <a:lstStyle/>
-          <a:p>
-            <a:pPr algn="l"/>
-            <a:r>
-              <a:rPr sz="1600" b="1">
-                <a:solidFill>
-                  <a:srgbClr val="000000"/>
-                </a:solidFill>
-              </a:rPr>
-              <a:t>●  Key results always included</a:t>
-            </a:r>
-          </a:p>
-        </p:txBody>
-      </p:sp>
-      <p:sp>
-        <p:nvSpPr>
-          <p:cNvPr id="10" name="Rectangle 9"/>
-          <p:cNvSpPr/>
-          <p:nvPr/>
-        </p:nvSpPr>
-        <p:spPr>
-          <a:xfrm>
-            <a:off x="731520" y="5486400"/>
-            <a:ext cx="10515600" cy="640080"/>
-          </a:xfrm>
-          <a:prstGeom prst="rect">
             <a:avLst/>
           </a:prstGeom>
           <a:solidFill>
@@ -3657,14 +3394,14 @@
       </p:sp>
       <p:sp>
         <p:nvSpPr>
-          <p:cNvPr id="11" name="TextBox 10"/>
+          <p:cNvPr id="5" name="TextBox 4"/>
           <p:cNvSpPr txBox="1"/>
           <p:nvPr/>
         </p:nvSpPr>
         <p:spPr>
           <a:xfrm>
-            <a:off x="1097280" y="5532120"/>
-            <a:ext cx="10058400" cy="548640"/>
+            <a:off x="1341120" y="1828800"/>
+            <a:ext cx="2743200" cy="914400"/>
           </a:xfrm>
           <a:prstGeom prst="rect">
             <a:avLst/>
@@ -3677,21 +3414,406 @@
           </a:bodyPr>
           <a:lstStyle/>
           <a:p>
-            <a:pPr algn="l"/>
-            <a:r>
-              <a:rPr sz="1800" b="1">
-                <a:solidFill>
-                  <a:srgbClr val="FF0000"/>
+            <a:pPr algn="ctr"/>
+            <a:r>
+              <a:rPr b="1" sz="4000">
+                <a:solidFill>
+                  <a:srgbClr val="000000"/>
                 </a:solidFill>
               </a:rPr>
-              <a:t>Abstract = research paper in miniature</a:t>
-            </a:r>
-          </a:p>
-        </p:txBody>
-      </p:sp>
-      <p:sp>
-        <p:nvSpPr>
-          <p:cNvPr id="12" name="TextBox 11"/>
+              <a:t>📋</a:t>
+            </a:r>
+          </a:p>
+        </p:txBody>
+      </p:sp>
+      <p:sp>
+        <p:nvSpPr>
+          <p:cNvPr id="6" name="TextBox 5"/>
+          <p:cNvSpPr txBox="1"/>
+          <p:nvPr/>
+        </p:nvSpPr>
+        <p:spPr>
+          <a:xfrm>
+            <a:off x="1341120" y="2743200"/>
+            <a:ext cx="2743200" cy="914400"/>
+          </a:xfrm>
+          <a:prstGeom prst="rect">
+            <a:avLst/>
+          </a:prstGeom>
+          <a:noFill/>
+        </p:spPr>
+        <p:txBody>
+          <a:bodyPr wrap="square">
+            <a:spAutoFit/>
+          </a:bodyPr>
+          <a:lstStyle/>
+          <a:p>
+            <a:pPr algn="ctr"/>
+            <a:r>
+              <a:rPr b="1" sz="1800">
+                <a:solidFill>
+                  <a:srgbClr val="000000"/>
+                </a:solidFill>
+              </a:rPr>
+              <a:t>Concise</a:t>
+            </a:r>
+            <a:br/>
+            <a:r>
+              <a:rPr b="1">
+                <a:solidFill>
+                  <a:srgbClr val="000000"/>
+                </a:solidFill>
+              </a:rPr>
+              <a:t>Summary</a:t>
+            </a:r>
+          </a:p>
+        </p:txBody>
+      </p:sp>
+      <p:sp>
+        <p:nvSpPr>
+          <p:cNvPr id="7" name="TextBox 6"/>
+          <p:cNvSpPr txBox="1"/>
+          <p:nvPr/>
+        </p:nvSpPr>
+        <p:spPr>
+          <a:xfrm>
+            <a:off x="1341120" y="3566160"/>
+            <a:ext cx="2743200" cy="457200"/>
+          </a:xfrm>
+          <a:prstGeom prst="rect">
+            <a:avLst/>
+          </a:prstGeom>
+          <a:noFill/>
+        </p:spPr>
+        <p:txBody>
+          <a:bodyPr wrap="square">
+            <a:spAutoFit/>
+          </a:bodyPr>
+          <a:lstStyle/>
+          <a:p>
+            <a:pPr algn="ctr"/>
+            <a:r>
+              <a:rPr b="1" sz="1400">
+                <a:solidFill>
+                  <a:srgbClr val="666666"/>
+                </a:solidFill>
+              </a:rPr>
+              <a:t>Of whole paper</a:t>
+            </a:r>
+          </a:p>
+        </p:txBody>
+      </p:sp>
+      <p:sp>
+        <p:nvSpPr>
+          <p:cNvPr id="8" name="Rounded Rectangle 7"/>
+          <p:cNvSpPr/>
+          <p:nvPr/>
+        </p:nvSpPr>
+        <p:spPr>
+          <a:xfrm>
+            <a:off x="4632960" y="1645920"/>
+            <a:ext cx="2926080" cy="2560320"/>
+          </a:xfrm>
+          <a:prstGeom prst="roundRect">
+            <a:avLst/>
+          </a:prstGeom>
+          <a:solidFill>
+            <a:srgbClr val="F5F0FA"/>
+          </a:solidFill>
+          <a:ln>
+            <a:noFill/>
+          </a:ln>
+        </p:spPr>
+        <p:style>
+          <a:lnRef idx="1">
+            <a:schemeClr val="accent1"/>
+          </a:lnRef>
+          <a:fillRef idx="3">
+            <a:schemeClr val="accent1"/>
+          </a:fillRef>
+          <a:effectRef idx="2">
+            <a:schemeClr val="accent1"/>
+          </a:effectRef>
+          <a:fontRef idx="minor">
+            <a:schemeClr val="lt1"/>
+          </a:fontRef>
+        </p:style>
+        <p:txBody>
+          <a:bodyPr rtlCol="0" anchor="ctr"/>
+          <a:lstStyle/>
+          <a:p>
+            <a:pPr algn="ctr"/>
+          </a:p>
+        </p:txBody>
+      </p:sp>
+      <p:sp>
+        <p:nvSpPr>
+          <p:cNvPr id="9" name="TextBox 8"/>
+          <p:cNvSpPr txBox="1"/>
+          <p:nvPr/>
+        </p:nvSpPr>
+        <p:spPr>
+          <a:xfrm>
+            <a:off x="4724400" y="1828800"/>
+            <a:ext cx="2743200" cy="914400"/>
+          </a:xfrm>
+          <a:prstGeom prst="rect">
+            <a:avLst/>
+          </a:prstGeom>
+          <a:noFill/>
+        </p:spPr>
+        <p:txBody>
+          <a:bodyPr wrap="square">
+            <a:spAutoFit/>
+          </a:bodyPr>
+          <a:lstStyle/>
+          <a:p>
+            <a:pPr algn="ctr"/>
+            <a:r>
+              <a:rPr b="1" sz="4000">
+                <a:solidFill>
+                  <a:srgbClr val="000000"/>
+                </a:solidFill>
+              </a:rPr>
+              <a:t>📏</a:t>
+            </a:r>
+          </a:p>
+        </p:txBody>
+      </p:sp>
+      <p:sp>
+        <p:nvSpPr>
+          <p:cNvPr id="10" name="TextBox 9"/>
+          <p:cNvSpPr txBox="1"/>
+          <p:nvPr/>
+        </p:nvSpPr>
+        <p:spPr>
+          <a:xfrm>
+            <a:off x="4724400" y="2743200"/>
+            <a:ext cx="2743200" cy="914400"/>
+          </a:xfrm>
+          <a:prstGeom prst="rect">
+            <a:avLst/>
+          </a:prstGeom>
+          <a:noFill/>
+        </p:spPr>
+        <p:txBody>
+          <a:bodyPr wrap="square">
+            <a:spAutoFit/>
+          </a:bodyPr>
+          <a:lstStyle/>
+          <a:p>
+            <a:pPr algn="ctr"/>
+            <a:r>
+              <a:rPr b="1" sz="1800">
+                <a:solidFill>
+                  <a:srgbClr val="000000"/>
+                </a:solidFill>
+              </a:rPr>
+              <a:t>100–200</a:t>
+            </a:r>
+            <a:br/>
+            <a:r>
+              <a:rPr b="1">
+                <a:solidFill>
+                  <a:srgbClr val="000000"/>
+                </a:solidFill>
+              </a:rPr>
+              <a:t>Words</a:t>
+            </a:r>
+          </a:p>
+        </p:txBody>
+      </p:sp>
+      <p:sp>
+        <p:nvSpPr>
+          <p:cNvPr id="11" name="TextBox 10"/>
+          <p:cNvSpPr txBox="1"/>
+          <p:nvPr/>
+        </p:nvSpPr>
+        <p:spPr>
+          <a:xfrm>
+            <a:off x="4724400" y="3566160"/>
+            <a:ext cx="2743200" cy="457200"/>
+          </a:xfrm>
+          <a:prstGeom prst="rect">
+            <a:avLst/>
+          </a:prstGeom>
+          <a:noFill/>
+        </p:spPr>
+        <p:txBody>
+          <a:bodyPr wrap="square">
+            <a:spAutoFit/>
+          </a:bodyPr>
+          <a:lstStyle/>
+          <a:p>
+            <a:pPr algn="ctr"/>
+            <a:r>
+              <a:rPr b="1" sz="1400">
+                <a:solidFill>
+                  <a:srgbClr val="666666"/>
+                </a:solidFill>
+              </a:rPr>
+              <a:t>Stands alone</a:t>
+            </a:r>
+          </a:p>
+        </p:txBody>
+      </p:sp>
+      <p:sp>
+        <p:nvSpPr>
+          <p:cNvPr id="12" name="Rounded Rectangle 11"/>
+          <p:cNvSpPr/>
+          <p:nvPr/>
+        </p:nvSpPr>
+        <p:spPr>
+          <a:xfrm>
+            <a:off x="8016240" y="1645920"/>
+            <a:ext cx="2926080" cy="2560320"/>
+          </a:xfrm>
+          <a:prstGeom prst="roundRect">
+            <a:avLst/>
+          </a:prstGeom>
+          <a:solidFill>
+            <a:srgbClr val="F5F0FA"/>
+          </a:solidFill>
+          <a:ln>
+            <a:noFill/>
+          </a:ln>
+        </p:spPr>
+        <p:style>
+          <a:lnRef idx="1">
+            <a:schemeClr val="accent1"/>
+          </a:lnRef>
+          <a:fillRef idx="3">
+            <a:schemeClr val="accent1"/>
+          </a:fillRef>
+          <a:effectRef idx="2">
+            <a:schemeClr val="accent1"/>
+          </a:effectRef>
+          <a:fontRef idx="minor">
+            <a:schemeClr val="lt1"/>
+          </a:fontRef>
+        </p:style>
+        <p:txBody>
+          <a:bodyPr rtlCol="0" anchor="ctr"/>
+          <a:lstStyle/>
+          <a:p>
+            <a:pPr algn="ctr"/>
+          </a:p>
+        </p:txBody>
+      </p:sp>
+      <p:sp>
+        <p:nvSpPr>
+          <p:cNvPr id="13" name="TextBox 12"/>
+          <p:cNvSpPr txBox="1"/>
+          <p:nvPr/>
+        </p:nvSpPr>
+        <p:spPr>
+          <a:xfrm>
+            <a:off x="8107680" y="1828800"/>
+            <a:ext cx="2743200" cy="914400"/>
+          </a:xfrm>
+          <a:prstGeom prst="rect">
+            <a:avLst/>
+          </a:prstGeom>
+          <a:noFill/>
+        </p:spPr>
+        <p:txBody>
+          <a:bodyPr wrap="square">
+            <a:spAutoFit/>
+          </a:bodyPr>
+          <a:lstStyle/>
+          <a:p>
+            <a:pPr algn="ctr"/>
+            <a:r>
+              <a:rPr b="1" sz="4000">
+                <a:solidFill>
+                  <a:srgbClr val="000000"/>
+                </a:solidFill>
+              </a:rPr>
+              <a:t>🔑</a:t>
+            </a:r>
+          </a:p>
+        </p:txBody>
+      </p:sp>
+      <p:sp>
+        <p:nvSpPr>
+          <p:cNvPr id="14" name="TextBox 13"/>
+          <p:cNvSpPr txBox="1"/>
+          <p:nvPr/>
+        </p:nvSpPr>
+        <p:spPr>
+          <a:xfrm>
+            <a:off x="8107680" y="2743200"/>
+            <a:ext cx="2743200" cy="914400"/>
+          </a:xfrm>
+          <a:prstGeom prst="rect">
+            <a:avLst/>
+          </a:prstGeom>
+          <a:noFill/>
+        </p:spPr>
+        <p:txBody>
+          <a:bodyPr wrap="square">
+            <a:spAutoFit/>
+          </a:bodyPr>
+          <a:lstStyle/>
+          <a:p>
+            <a:pPr algn="ctr"/>
+            <a:r>
+              <a:rPr b="1" sz="1800">
+                <a:solidFill>
+                  <a:srgbClr val="000000"/>
+                </a:solidFill>
+              </a:rPr>
+              <a:t>Key Results</a:t>
+            </a:r>
+            <a:br/>
+            <a:r>
+              <a:rPr b="1">
+                <a:solidFill>
+                  <a:srgbClr val="000000"/>
+                </a:solidFill>
+              </a:rPr>
+              <a:t>Included</a:t>
+            </a:r>
+          </a:p>
+        </p:txBody>
+      </p:sp>
+      <p:sp>
+        <p:nvSpPr>
+          <p:cNvPr id="15" name="TextBox 14"/>
+          <p:cNvSpPr txBox="1"/>
+          <p:nvPr/>
+        </p:nvSpPr>
+        <p:spPr>
+          <a:xfrm>
+            <a:off x="8107680" y="3566160"/>
+            <a:ext cx="2743200" cy="457200"/>
+          </a:xfrm>
+          <a:prstGeom prst="rect">
+            <a:avLst/>
+          </a:prstGeom>
+          <a:noFill/>
+        </p:spPr>
+        <p:txBody>
+          <a:bodyPr wrap="square">
+            <a:spAutoFit/>
+          </a:bodyPr>
+          <a:lstStyle/>
+          <a:p>
+            <a:pPr algn="ctr"/>
+            <a:r>
+              <a:rPr b="1" sz="1400">
+                <a:solidFill>
+                  <a:srgbClr val="666666"/>
+                </a:solidFill>
+              </a:rPr>
+              <a:t>No abbreviations</a:t>
+            </a:r>
+          </a:p>
+        </p:txBody>
+      </p:sp>
+      <p:sp>
+        <p:nvSpPr>
+          <p:cNvPr id="16" name="TextBox 15"/>
           <p:cNvSpPr txBox="1"/>
           <p:nvPr/>
         </p:nvSpPr>
@@ -3821,7 +3943,7 @@
                   <a:srgbClr val="000000"/>
                 </a:solidFill>
               </a:rPr>
-              <a:t>Why read abstracts?</a:t>
+              <a:t>7 Elements of an Abstract</a:t>
             </a:r>
           </a:p>
         </p:txBody>
@@ -3834,8 +3956,8 @@
         </p:nvSpPr>
         <p:spPr>
           <a:xfrm>
-            <a:off x="914400" y="1828800"/>
-            <a:ext cx="2286000" cy="914400"/>
+            <a:off x="1661160" y="2377440"/>
+            <a:ext cx="1188720" cy="640080"/>
           </a:xfrm>
           <a:prstGeom prst="roundRect">
             <a:avLst/>
@@ -3843,10 +3965,8 @@
           <a:solidFill>
             <a:srgbClr val="7C3A9E"/>
           </a:solidFill>
-          <a:ln w="12700">
-            <a:solidFill>
-              <a:srgbClr val="7C3A9E"/>
-            </a:solidFill>
+          <a:ln>
+            <a:noFill/>
           </a:ln>
         </p:spPr>
         <p:style>
@@ -3869,21 +3989,12 @@
           <a:p>
             <a:pPr algn="ctr"/>
             <a:r>
-              <a:rPr sz="1400" b="1">
+              <a:rPr sz="1200" b="1">
                 <a:solidFill>
                   <a:srgbClr val="FFFFFF"/>
                 </a:solidFill>
               </a:rPr>
-              <a:t>Read</a:t>
-            </a:r>
-            <a:br/>
-            <a:r>
-              <a:rPr sz="1400" b="1">
-                <a:solidFill>
-                  <a:srgbClr val="FFFFFF"/>
-                </a:solidFill>
-              </a:rPr>
-              <a:t>Abstract</a:t>
+              <a:t>Context</a:t>
             </a:r>
           </a:p>
         </p:txBody>
@@ -3896,8 +4007,8 @@
         </p:nvCxnSpPr>
         <p:spPr>
           <a:xfrm>
-            <a:off x="3200400" y="2286000"/>
-            <a:ext cx="1371600" cy="0"/>
+            <a:off x="2849880" y="2697480"/>
+            <a:ext cx="91440" cy="0"/>
           </a:xfrm>
           <a:prstGeom prst="line">
             <a:avLst/>
@@ -3932,8 +4043,8 @@
         </p:nvSpPr>
         <p:spPr>
           <a:xfrm>
-            <a:off x="4572000" y="1828800"/>
-            <a:ext cx="1828800" cy="914400"/>
+            <a:off x="2941320" y="2377440"/>
+            <a:ext cx="1188720" cy="640080"/>
           </a:xfrm>
           <a:prstGeom prst="roundRect">
             <a:avLst/>
@@ -3941,10 +4052,8 @@
           <a:solidFill>
             <a:srgbClr val="502379"/>
           </a:solidFill>
-          <a:ln w="12700">
-            <a:solidFill>
-              <a:srgbClr val="502379"/>
-            </a:solidFill>
+          <a:ln>
+            <a:noFill/>
           </a:ln>
         </p:spPr>
         <p:style>
@@ -3967,21 +4076,12 @@
           <a:p>
             <a:pPr algn="ctr"/>
             <a:r>
-              <a:rPr sz="1400" b="1">
+              <a:rPr sz="1200" b="1">
                 <a:solidFill>
                   <a:srgbClr val="FFFFFF"/>
                 </a:solidFill>
               </a:rPr>
-              <a:t>Relevant</a:t>
-            </a:r>
-            <a:br/>
-            <a:r>
-              <a:rPr sz="1400" b="1">
-                <a:solidFill>
-                  <a:srgbClr val="FFFFFF"/>
-                </a:solidFill>
-              </a:rPr>
-              <a:t>?</a:t>
+              <a:t>Significance</a:t>
             </a:r>
           </a:p>
         </p:txBody>
@@ -3993,9 +4093,9 @@
           <p:nvPr/>
         </p:nvCxnSpPr>
         <p:spPr>
-          <a:xfrm flipV="1">
-            <a:off x="6400800" y="1828800"/>
-            <a:ext cx="1371600" cy="91440"/>
+          <a:xfrm>
+            <a:off x="4130040" y="2697480"/>
+            <a:ext cx="91440" cy="0"/>
           </a:xfrm>
           <a:prstGeom prst="line">
             <a:avLst/>
@@ -4030,19 +4130,17 @@
         </p:nvSpPr>
         <p:spPr>
           <a:xfrm>
-            <a:off x="7772400" y="1371600"/>
-            <a:ext cx="2286000" cy="914400"/>
+            <a:off x="4221480" y="2377440"/>
+            <a:ext cx="1188720" cy="640080"/>
           </a:xfrm>
           <a:prstGeom prst="roundRect">
             <a:avLst/>
           </a:prstGeom>
           <a:solidFill>
-            <a:srgbClr val="F5F0FA"/>
+            <a:srgbClr val="7C3A9E"/>
           </a:solidFill>
-          <a:ln w="12700">
-            <a:solidFill>
-              <a:srgbClr val="7C3A9E"/>
-            </a:solidFill>
+          <a:ln>
+            <a:noFill/>
           </a:ln>
         </p:spPr>
         <p:style>
@@ -4067,19 +4165,10 @@
             <a:r>
               <a:rPr sz="1200" b="1">
                 <a:solidFill>
-                  <a:srgbClr val="000000"/>
+                  <a:srgbClr val="FFFFFF"/>
                 </a:solidFill>
               </a:rPr>
-              <a:t>Read Full</a:t>
-            </a:r>
-            <a:br/>
-            <a:r>
-              <a:rPr sz="1200" b="1">
-                <a:solidFill>
-                  <a:srgbClr val="000000"/>
-                </a:solidFill>
-              </a:rPr>
-              <a:t>Paper ✓</a:t>
+              <a:t>Aims</a:t>
             </a:r>
           </a:p>
         </p:txBody>
@@ -4092,8 +4181,8 @@
         </p:nvCxnSpPr>
         <p:spPr>
           <a:xfrm>
-            <a:off x="5486400" y="2743200"/>
-            <a:ext cx="2286000" cy="914400"/>
+            <a:off x="5410200" y="2697480"/>
+            <a:ext cx="91440" cy="0"/>
           </a:xfrm>
           <a:prstGeom prst="line">
             <a:avLst/>
@@ -4128,19 +4217,17 @@
         </p:nvSpPr>
         <p:spPr>
           <a:xfrm>
-            <a:off x="7772400" y="3200400"/>
-            <a:ext cx="2286000" cy="914400"/>
+            <a:off x="5501640" y="2377440"/>
+            <a:ext cx="1188720" cy="640080"/>
           </a:xfrm>
           <a:prstGeom prst="roundRect">
             <a:avLst/>
           </a:prstGeom>
           <a:solidFill>
-            <a:srgbClr val="F5F0FA"/>
+            <a:srgbClr val="502379"/>
           </a:solidFill>
-          <a:ln w="12700">
-            <a:solidFill>
-              <a:srgbClr val="7C3A9E"/>
-            </a:solidFill>
+          <a:ln>
+            <a:noFill/>
           </a:ln>
         </p:spPr>
         <p:style>
@@ -4165,107 +4252,66 @@
             <a:r>
               <a:rPr sz="1200" b="1">
                 <a:solidFill>
-                  <a:srgbClr val="000000"/>
+                  <a:srgbClr val="FFFFFF"/>
                 </a:solidFill>
               </a:rPr>
-              <a:t>Skip →</a:t>
-            </a:r>
-            <a:br/>
-            <a:r>
-              <a:rPr sz="1200" b="1">
-                <a:solidFill>
-                  <a:srgbClr val="000000"/>
-                </a:solidFill>
-              </a:rPr>
-              <a:t>Next ✗</a:t>
-            </a:r>
-          </a:p>
-        </p:txBody>
-      </p:sp>
-      <p:sp>
-        <p:nvSpPr>
-          <p:cNvPr id="11" name="TextBox 10"/>
-          <p:cNvSpPr txBox="1"/>
-          <p:nvPr/>
-        </p:nvSpPr>
-        <p:spPr>
-          <a:xfrm>
-            <a:off x="6578600" y="1188720"/>
-            <a:ext cx="1097280" cy="365760"/>
-          </a:xfrm>
-          <a:prstGeom prst="rect">
-            <a:avLst/>
-          </a:prstGeom>
-          <a:noFill/>
-        </p:spPr>
-        <p:txBody>
-          <a:bodyPr wrap="square">
-            <a:spAutoFit/>
-          </a:bodyPr>
-          <a:lstStyle/>
-          <a:p>
-            <a:pPr algn="ctr"/>
-            <a:r>
-              <a:rPr sz="1400" b="1">
-                <a:solidFill>
-                  <a:srgbClr val="7C3A9E"/>
-                </a:solidFill>
-              </a:rPr>
-              <a:t>Yes</a:t>
-            </a:r>
-          </a:p>
-        </p:txBody>
-      </p:sp>
-      <p:sp>
-        <p:nvSpPr>
-          <p:cNvPr id="12" name="TextBox 11"/>
-          <p:cNvSpPr txBox="1"/>
-          <p:nvPr/>
-        </p:nvSpPr>
-        <p:spPr>
-          <a:xfrm>
-            <a:off x="5664200" y="2926080"/>
-            <a:ext cx="1097280" cy="365760"/>
-          </a:xfrm>
-          <a:prstGeom prst="rect">
-            <a:avLst/>
-          </a:prstGeom>
-          <a:noFill/>
-        </p:spPr>
-        <p:txBody>
-          <a:bodyPr wrap="square">
-            <a:spAutoFit/>
-          </a:bodyPr>
-          <a:lstStyle/>
-          <a:p>
-            <a:pPr algn="ctr"/>
-            <a:r>
-              <a:rPr sz="1400" b="1">
-                <a:solidFill>
-                  <a:srgbClr val="FF0000"/>
-                </a:solidFill>
-              </a:rPr>
-              <a:t>No</a:t>
-            </a:r>
-          </a:p>
-        </p:txBody>
-      </p:sp>
-      <p:sp>
-        <p:nvSpPr>
-          <p:cNvPr id="13" name="Rectangle 12"/>
+              <a:t>Method</a:t>
+            </a:r>
+          </a:p>
+        </p:txBody>
+      </p:sp>
+      <p:cxnSp>
+        <p:nvCxnSpPr>
+          <p:cNvPr id="11" name="Connector 10"/>
+          <p:cNvCxnSpPr/>
+          <p:nvPr/>
+        </p:nvCxnSpPr>
+        <p:spPr>
+          <a:xfrm>
+            <a:off x="6690360" y="2697480"/>
+            <a:ext cx="91440" cy="0"/>
+          </a:xfrm>
+          <a:prstGeom prst="line">
+            <a:avLst/>
+          </a:prstGeom>
+          <a:ln w="27432">
+            <a:solidFill>
+              <a:srgbClr val="7C3A9E"/>
+            </a:solidFill>
+            <a:tailEnd type="triangle" w="med" len="med"/>
+          </a:ln>
+        </p:spPr>
+        <p:style>
+          <a:lnRef idx="2">
+            <a:schemeClr val="accent1"/>
+          </a:lnRef>
+          <a:fillRef idx="0">
+            <a:schemeClr val="accent1"/>
+          </a:fillRef>
+          <a:effectRef idx="1">
+            <a:schemeClr val="accent1"/>
+          </a:effectRef>
+          <a:fontRef idx="minor">
+            <a:schemeClr val="tx1"/>
+          </a:fontRef>
+        </p:style>
+      </p:cxnSp>
+      <p:sp>
+        <p:nvSpPr>
+          <p:cNvPr id="12" name="Rounded Rectangle 11"/>
           <p:cNvSpPr/>
           <p:nvPr/>
         </p:nvSpPr>
         <p:spPr>
           <a:xfrm>
-            <a:off x="731520" y="5486400"/>
-            <a:ext cx="10515600" cy="640080"/>
-          </a:xfrm>
-          <a:prstGeom prst="rect">
+            <a:off x="6781800" y="2377440"/>
+            <a:ext cx="1188720" cy="640080"/>
+          </a:xfrm>
+          <a:prstGeom prst="roundRect">
             <a:avLst/>
           </a:prstGeom>
           <a:solidFill>
-            <a:srgbClr val="F5F0FA"/>
+            <a:srgbClr val="7C3A9E"/>
           </a:solidFill>
           <a:ln>
             <a:noFill/>
@@ -4286,23 +4332,205 @@
           </a:fontRef>
         </p:style>
         <p:txBody>
-          <a:bodyPr rtlCol="0" anchor="ctr"/>
+          <a:bodyPr rtlCol="0" anchor="ctr" wrap="square"/>
           <a:lstStyle/>
           <a:p>
             <a:pPr algn="ctr"/>
-          </a:p>
-        </p:txBody>
-      </p:sp>
-      <p:sp>
-        <p:nvSpPr>
-          <p:cNvPr id="14" name="TextBox 13"/>
+            <a:r>
+              <a:rPr sz="1200" b="1">
+                <a:solidFill>
+                  <a:srgbClr val="FFFFFF"/>
+                </a:solidFill>
+              </a:rPr>
+              <a:t>Findings</a:t>
+            </a:r>
+          </a:p>
+        </p:txBody>
+      </p:sp>
+      <p:cxnSp>
+        <p:nvCxnSpPr>
+          <p:cNvPr id="13" name="Connector 12"/>
+          <p:cNvCxnSpPr/>
+          <p:nvPr/>
+        </p:nvCxnSpPr>
+        <p:spPr>
+          <a:xfrm>
+            <a:off x="7970520" y="2697480"/>
+            <a:ext cx="91440" cy="0"/>
+          </a:xfrm>
+          <a:prstGeom prst="line">
+            <a:avLst/>
+          </a:prstGeom>
+          <a:ln w="27432">
+            <a:solidFill>
+              <a:srgbClr val="7C3A9E"/>
+            </a:solidFill>
+            <a:tailEnd type="triangle" w="med" len="med"/>
+          </a:ln>
+        </p:spPr>
+        <p:style>
+          <a:lnRef idx="2">
+            <a:schemeClr val="accent1"/>
+          </a:lnRef>
+          <a:fillRef idx="0">
+            <a:schemeClr val="accent1"/>
+          </a:fillRef>
+          <a:effectRef idx="1">
+            <a:schemeClr val="accent1"/>
+          </a:effectRef>
+          <a:fontRef idx="minor">
+            <a:schemeClr val="tx1"/>
+          </a:fontRef>
+        </p:style>
+      </p:cxnSp>
+      <p:sp>
+        <p:nvSpPr>
+          <p:cNvPr id="14" name="Rounded Rectangle 13"/>
+          <p:cNvSpPr/>
+          <p:nvPr/>
+        </p:nvSpPr>
+        <p:spPr>
+          <a:xfrm>
+            <a:off x="8061960" y="2377440"/>
+            <a:ext cx="1188720" cy="640080"/>
+          </a:xfrm>
+          <a:prstGeom prst="roundRect">
+            <a:avLst/>
+          </a:prstGeom>
+          <a:solidFill>
+            <a:srgbClr val="502379"/>
+          </a:solidFill>
+          <a:ln>
+            <a:noFill/>
+          </a:ln>
+        </p:spPr>
+        <p:style>
+          <a:lnRef idx="1">
+            <a:schemeClr val="accent1"/>
+          </a:lnRef>
+          <a:fillRef idx="3">
+            <a:schemeClr val="accent1"/>
+          </a:fillRef>
+          <a:effectRef idx="2">
+            <a:schemeClr val="accent1"/>
+          </a:effectRef>
+          <a:fontRef idx="minor">
+            <a:schemeClr val="lt1"/>
+          </a:fontRef>
+        </p:style>
+        <p:txBody>
+          <a:bodyPr rtlCol="0" anchor="ctr" wrap="square"/>
+          <a:lstStyle/>
+          <a:p>
+            <a:pPr algn="ctr"/>
+            <a:r>
+              <a:rPr sz="1200" b="1">
+                <a:solidFill>
+                  <a:srgbClr val="FFFFFF"/>
+                </a:solidFill>
+              </a:rPr>
+              <a:t>Discussion</a:t>
+            </a:r>
+          </a:p>
+        </p:txBody>
+      </p:sp>
+      <p:cxnSp>
+        <p:nvCxnSpPr>
+          <p:cNvPr id="15" name="Connector 14"/>
+          <p:cNvCxnSpPr/>
+          <p:nvPr/>
+        </p:nvCxnSpPr>
+        <p:spPr>
+          <a:xfrm>
+            <a:off x="9250680" y="2697480"/>
+            <a:ext cx="91440" cy="0"/>
+          </a:xfrm>
+          <a:prstGeom prst="line">
+            <a:avLst/>
+          </a:prstGeom>
+          <a:ln w="27432">
+            <a:solidFill>
+              <a:srgbClr val="7C3A9E"/>
+            </a:solidFill>
+            <a:tailEnd type="triangle" w="med" len="med"/>
+          </a:ln>
+        </p:spPr>
+        <p:style>
+          <a:lnRef idx="2">
+            <a:schemeClr val="accent1"/>
+          </a:lnRef>
+          <a:fillRef idx="0">
+            <a:schemeClr val="accent1"/>
+          </a:fillRef>
+          <a:effectRef idx="1">
+            <a:schemeClr val="accent1"/>
+          </a:effectRef>
+          <a:fontRef idx="minor">
+            <a:schemeClr val="tx1"/>
+          </a:fontRef>
+        </p:style>
+      </p:cxnSp>
+      <p:sp>
+        <p:nvSpPr>
+          <p:cNvPr id="16" name="Rounded Rectangle 15"/>
+          <p:cNvSpPr/>
+          <p:nvPr/>
+        </p:nvSpPr>
+        <p:spPr>
+          <a:xfrm>
+            <a:off x="9342120" y="2377440"/>
+            <a:ext cx="1188720" cy="640080"/>
+          </a:xfrm>
+          <a:prstGeom prst="roundRect">
+            <a:avLst/>
+          </a:prstGeom>
+          <a:solidFill>
+            <a:srgbClr val="7C3A9E"/>
+          </a:solidFill>
+          <a:ln>
+            <a:noFill/>
+          </a:ln>
+        </p:spPr>
+        <p:style>
+          <a:lnRef idx="1">
+            <a:schemeClr val="accent1"/>
+          </a:lnRef>
+          <a:fillRef idx="3">
+            <a:schemeClr val="accent1"/>
+          </a:fillRef>
+          <a:effectRef idx="2">
+            <a:schemeClr val="accent1"/>
+          </a:effectRef>
+          <a:fontRef idx="minor">
+            <a:schemeClr val="lt1"/>
+          </a:fontRef>
+        </p:style>
+        <p:txBody>
+          <a:bodyPr rtlCol="0" anchor="ctr" wrap="square"/>
+          <a:lstStyle/>
+          <a:p>
+            <a:pPr algn="ctr"/>
+            <a:r>
+              <a:rPr sz="1200" b="1">
+                <a:solidFill>
+                  <a:srgbClr val="FFFFFF"/>
+                </a:solidFill>
+              </a:rPr>
+              <a:t>Implications</a:t>
+            </a:r>
+          </a:p>
+        </p:txBody>
+      </p:sp>
+      <p:sp>
+        <p:nvSpPr>
+          <p:cNvPr id="17" name="TextBox 16"/>
           <p:cNvSpPr txBox="1"/>
           <p:nvPr/>
         </p:nvSpPr>
         <p:spPr>
           <a:xfrm>
-            <a:off x="1097280" y="5532120"/>
-            <a:ext cx="10058400" cy="548640"/>
+            <a:off x="914400" y="3474720"/>
+            <a:ext cx="10058400" cy="365760"/>
           </a:xfrm>
           <a:prstGeom prst="rect">
             <a:avLst/>
@@ -4317,19 +4545,19 @@
           <a:p>
             <a:pPr algn="l"/>
             <a:r>
-              <a:rPr sz="1800" b="1">
-                <a:solidFill>
-                  <a:srgbClr val="FF0000"/>
+              <a:rPr b="1" sz="1400">
+                <a:solidFill>
+                  <a:srgbClr val="666666"/>
                 </a:solidFill>
               </a:rPr>
-              <a:t>Effective reading starts with the abstract</a:t>
-            </a:r>
-          </a:p>
-        </p:txBody>
-      </p:sp>
-      <p:sp>
-        <p:nvSpPr>
-          <p:cNvPr id="15" name="TextBox 14"/>
+              <a:t>Not all abstracts include all 7 elements</a:t>
+            </a:r>
+          </a:p>
+        </p:txBody>
+      </p:sp>
+      <p:sp>
+        <p:nvSpPr>
+          <p:cNvPr id="18" name="TextBox 17"/>
           <p:cNvSpPr txBox="1"/>
           <p:nvPr/>
         </p:nvSpPr>
@@ -4459,7 +4687,7 @@
                   <a:srgbClr val="000000"/>
                 </a:solidFill>
               </a:rPr>
-              <a:t>7 elements of an abstract</a:t>
+              <a:t>Common Language in Abstracts</a:t>
             </a:r>
           </a:p>
         </p:txBody>
@@ -4472,8 +4700,8 @@
         </p:nvSpPr>
         <p:spPr>
           <a:xfrm>
-            <a:off x="1912620" y="1554480"/>
-            <a:ext cx="1097280" cy="731520"/>
+            <a:off x="998220" y="1463040"/>
+            <a:ext cx="2377440" cy="2194560"/>
           </a:xfrm>
           <a:prstGeom prst="roundRect">
             <a:avLst/>
@@ -4481,10 +4709,8 @@
           <a:solidFill>
             <a:srgbClr val="7C3A9E"/>
           </a:solidFill>
-          <a:ln w="12700">
-            <a:solidFill>
-              <a:srgbClr val="7C3A9E"/>
-            </a:solidFill>
+          <a:ln>
+            <a:noFill/>
           </a:ln>
         </p:spPr>
         <p:style>
@@ -4502,67 +4728,91 @@
           </a:fontRef>
         </p:style>
         <p:txBody>
-          <a:bodyPr rtlCol="0" anchor="ctr" wrap="square"/>
+          <a:bodyPr rtlCol="0" anchor="ctr"/>
           <a:lstStyle/>
           <a:p>
             <a:pPr algn="ctr"/>
-            <a:r>
-              <a:rPr sz="1200" b="1">
+          </a:p>
+        </p:txBody>
+      </p:sp>
+      <p:sp>
+        <p:nvSpPr>
+          <p:cNvPr id="5" name="TextBox 4"/>
+          <p:cNvSpPr txBox="1"/>
+          <p:nvPr/>
+        </p:nvSpPr>
+        <p:spPr>
+          <a:xfrm>
+            <a:off x="1089660" y="1645920"/>
+            <a:ext cx="2194560" cy="731520"/>
+          </a:xfrm>
+          <a:prstGeom prst="rect">
+            <a:avLst/>
+          </a:prstGeom>
+          <a:noFill/>
+        </p:spPr>
+        <p:txBody>
+          <a:bodyPr wrap="square">
+            <a:spAutoFit/>
+          </a:bodyPr>
+          <a:lstStyle/>
+          <a:p>
+            <a:pPr algn="ctr"/>
+            <a:r>
+              <a:rPr b="1" sz="2400">
                 <a:solidFill>
                   <a:srgbClr val="FFFFFF"/>
                 </a:solidFill>
               </a:rPr>
-              <a:t>Context</a:t>
-            </a:r>
-          </a:p>
-        </p:txBody>
-      </p:sp>
-      <p:cxnSp>
-        <p:nvCxnSpPr>
-          <p:cNvPr id="5" name="Connector 4"/>
-          <p:cNvCxnSpPr/>
-          <p:nvPr/>
-        </p:nvCxnSpPr>
-        <p:spPr>
-          <a:xfrm>
-            <a:off x="3009900" y="1920240"/>
-            <a:ext cx="114300" cy="0"/>
-          </a:xfrm>
-          <a:prstGeom prst="line">
-            <a:avLst/>
-          </a:prstGeom>
-          <a:ln w="27432">
-            <a:solidFill>
-              <a:srgbClr val="7C3A9E"/>
-            </a:solidFill>
-            <a:tailEnd type="triangle" w="med" len="med"/>
-          </a:ln>
-        </p:spPr>
-        <p:style>
-          <a:lnRef idx="2">
-            <a:schemeClr val="accent1"/>
-          </a:lnRef>
-          <a:fillRef idx="0">
-            <a:schemeClr val="accent1"/>
-          </a:fillRef>
-          <a:effectRef idx="1">
-            <a:schemeClr val="accent1"/>
-          </a:effectRef>
-          <a:fontRef idx="minor">
-            <a:schemeClr val="tx1"/>
-          </a:fontRef>
-        </p:style>
-      </p:cxnSp>
-      <p:sp>
-        <p:nvSpPr>
-          <p:cNvPr id="6" name="Rounded Rectangle 5"/>
+              <a:t>paper</a:t>
+            </a:r>
+          </a:p>
+        </p:txBody>
+      </p:sp>
+      <p:sp>
+        <p:nvSpPr>
+          <p:cNvPr id="6" name="TextBox 5"/>
+          <p:cNvSpPr txBox="1"/>
+          <p:nvPr/>
+        </p:nvSpPr>
+        <p:spPr>
+          <a:xfrm>
+            <a:off x="1089660" y="2555760"/>
+            <a:ext cx="2194560" cy="548640"/>
+          </a:xfrm>
+          <a:prstGeom prst="rect">
+            <a:avLst/>
+          </a:prstGeom>
+          <a:noFill/>
+        </p:spPr>
+        <p:txBody>
+          <a:bodyPr wrap="square">
+            <a:spAutoFit/>
+          </a:bodyPr>
+          <a:lstStyle/>
+          <a:p>
+            <a:pPr algn="ctr"/>
+            <a:r>
+              <a:rPr b="1" sz="2000">
+                <a:solidFill>
+                  <a:srgbClr val="DDDDFF"/>
+                </a:solidFill>
+              </a:rPr>
+              <a:t>499×</a:t>
+            </a:r>
+          </a:p>
+        </p:txBody>
+      </p:sp>
+      <p:sp>
+        <p:nvSpPr>
+          <p:cNvPr id="7" name="Rounded Rectangle 6"/>
           <p:cNvSpPr/>
           <p:nvPr/>
         </p:nvSpPr>
         <p:spPr>
           <a:xfrm>
-            <a:off x="3124200" y="1554480"/>
-            <a:ext cx="1097280" cy="731520"/>
+            <a:off x="3604260" y="1463040"/>
+            <a:ext cx="2377440" cy="2194560"/>
           </a:xfrm>
           <a:prstGeom prst="roundRect">
             <a:avLst/>
@@ -4570,10 +4820,8 @@
           <a:solidFill>
             <a:srgbClr val="502379"/>
           </a:solidFill>
-          <a:ln w="12700">
-            <a:solidFill>
-              <a:srgbClr val="502379"/>
-            </a:solidFill>
+          <a:ln>
+            <a:noFill/>
           </a:ln>
         </p:spPr>
         <p:style>
@@ -4591,67 +4839,91 @@
           </a:fontRef>
         </p:style>
         <p:txBody>
-          <a:bodyPr rtlCol="0" anchor="ctr" wrap="square"/>
+          <a:bodyPr rtlCol="0" anchor="ctr"/>
           <a:lstStyle/>
           <a:p>
             <a:pPr algn="ctr"/>
-            <a:r>
-              <a:rPr sz="1200" b="1">
+          </a:p>
+        </p:txBody>
+      </p:sp>
+      <p:sp>
+        <p:nvSpPr>
+          <p:cNvPr id="8" name="TextBox 7"/>
+          <p:cNvSpPr txBox="1"/>
+          <p:nvPr/>
+        </p:nvSpPr>
+        <p:spPr>
+          <a:xfrm>
+            <a:off x="3695700" y="1645920"/>
+            <a:ext cx="2194560" cy="731520"/>
+          </a:xfrm>
+          <a:prstGeom prst="rect">
+            <a:avLst/>
+          </a:prstGeom>
+          <a:noFill/>
+        </p:spPr>
+        <p:txBody>
+          <a:bodyPr wrap="square">
+            <a:spAutoFit/>
+          </a:bodyPr>
+          <a:lstStyle/>
+          <a:p>
+            <a:pPr algn="ctr"/>
+            <a:r>
+              <a:rPr b="1" sz="2400">
                 <a:solidFill>
                   <a:srgbClr val="FFFFFF"/>
                 </a:solidFill>
               </a:rPr>
-              <a:t>Significance</a:t>
-            </a:r>
-          </a:p>
-        </p:txBody>
-      </p:sp>
-      <p:cxnSp>
-        <p:nvCxnSpPr>
-          <p:cNvPr id="7" name="Connector 6"/>
-          <p:cNvCxnSpPr/>
-          <p:nvPr/>
-        </p:nvCxnSpPr>
-        <p:spPr>
-          <a:xfrm>
-            <a:off x="4221480" y="1920240"/>
-            <a:ext cx="114300" cy="0"/>
-          </a:xfrm>
-          <a:prstGeom prst="line">
-            <a:avLst/>
-          </a:prstGeom>
-          <a:ln w="27432">
-            <a:solidFill>
-              <a:srgbClr val="7C3A9E"/>
-            </a:solidFill>
-            <a:tailEnd type="triangle" w="med" len="med"/>
-          </a:ln>
-        </p:spPr>
-        <p:style>
-          <a:lnRef idx="2">
-            <a:schemeClr val="accent1"/>
-          </a:lnRef>
-          <a:fillRef idx="0">
-            <a:schemeClr val="accent1"/>
-          </a:fillRef>
-          <a:effectRef idx="1">
-            <a:schemeClr val="accent1"/>
-          </a:effectRef>
-          <a:fontRef idx="minor">
-            <a:schemeClr val="tx1"/>
-          </a:fontRef>
-        </p:style>
-      </p:cxnSp>
-      <p:sp>
-        <p:nvSpPr>
-          <p:cNvPr id="8" name="Rounded Rectangle 7"/>
+              <a:t>study</a:t>
+            </a:r>
+          </a:p>
+        </p:txBody>
+      </p:sp>
+      <p:sp>
+        <p:nvSpPr>
+          <p:cNvPr id="9" name="TextBox 8"/>
+          <p:cNvSpPr txBox="1"/>
+          <p:nvPr/>
+        </p:nvSpPr>
+        <p:spPr>
+          <a:xfrm>
+            <a:off x="3695700" y="2555760"/>
+            <a:ext cx="2194560" cy="548640"/>
+          </a:xfrm>
+          <a:prstGeom prst="rect">
+            <a:avLst/>
+          </a:prstGeom>
+          <a:noFill/>
+        </p:spPr>
+        <p:txBody>
+          <a:bodyPr wrap="square">
+            <a:spAutoFit/>
+          </a:bodyPr>
+          <a:lstStyle/>
+          <a:p>
+            <a:pPr algn="ctr"/>
+            <a:r>
+              <a:rPr b="1" sz="2000">
+                <a:solidFill>
+                  <a:srgbClr val="DDDDFF"/>
+                </a:solidFill>
+              </a:rPr>
+              <a:t>170×</a:t>
+            </a:r>
+          </a:p>
+        </p:txBody>
+      </p:sp>
+      <p:sp>
+        <p:nvSpPr>
+          <p:cNvPr id="10" name="Rounded Rectangle 9"/>
           <p:cNvSpPr/>
           <p:nvPr/>
         </p:nvSpPr>
         <p:spPr>
           <a:xfrm>
-            <a:off x="4335780" y="1554480"/>
-            <a:ext cx="1097280" cy="731520"/>
+            <a:off x="6210300" y="1463040"/>
+            <a:ext cx="2377440" cy="2194560"/>
           </a:xfrm>
           <a:prstGeom prst="roundRect">
             <a:avLst/>
@@ -4659,10 +4931,8 @@
           <a:solidFill>
             <a:srgbClr val="7C3A9E"/>
           </a:solidFill>
-          <a:ln w="12700">
-            <a:solidFill>
-              <a:srgbClr val="7C3A9E"/>
-            </a:solidFill>
+          <a:ln>
+            <a:noFill/>
           </a:ln>
         </p:spPr>
         <p:style>
@@ -4680,67 +4950,91 @@
           </a:fontRef>
         </p:style>
         <p:txBody>
-          <a:bodyPr rtlCol="0" anchor="ctr" wrap="square"/>
+          <a:bodyPr rtlCol="0" anchor="ctr"/>
           <a:lstStyle/>
           <a:p>
             <a:pPr algn="ctr"/>
-            <a:r>
-              <a:rPr sz="1200" b="1">
+          </a:p>
+        </p:txBody>
+      </p:sp>
+      <p:sp>
+        <p:nvSpPr>
+          <p:cNvPr id="11" name="TextBox 10"/>
+          <p:cNvSpPr txBox="1"/>
+          <p:nvPr/>
+        </p:nvSpPr>
+        <p:spPr>
+          <a:xfrm>
+            <a:off x="6301740" y="1645920"/>
+            <a:ext cx="2194560" cy="731520"/>
+          </a:xfrm>
+          <a:prstGeom prst="rect">
+            <a:avLst/>
+          </a:prstGeom>
+          <a:noFill/>
+        </p:spPr>
+        <p:txBody>
+          <a:bodyPr wrap="square">
+            <a:spAutoFit/>
+          </a:bodyPr>
+          <a:lstStyle/>
+          <a:p>
+            <a:pPr algn="ctr"/>
+            <a:r>
+              <a:rPr b="1" sz="2400">
                 <a:solidFill>
                   <a:srgbClr val="FFFFFF"/>
                 </a:solidFill>
               </a:rPr>
-              <a:t>Aims</a:t>
-            </a:r>
-          </a:p>
-        </p:txBody>
-      </p:sp>
-      <p:cxnSp>
-        <p:nvCxnSpPr>
-          <p:cNvPr id="9" name="Connector 8"/>
-          <p:cNvCxnSpPr/>
-          <p:nvPr/>
-        </p:nvCxnSpPr>
-        <p:spPr>
-          <a:xfrm>
-            <a:off x="5433060" y="1920240"/>
-            <a:ext cx="114300" cy="0"/>
-          </a:xfrm>
-          <a:prstGeom prst="line">
-            <a:avLst/>
-          </a:prstGeom>
-          <a:ln w="27432">
-            <a:solidFill>
-              <a:srgbClr val="7C3A9E"/>
-            </a:solidFill>
-            <a:tailEnd type="triangle" w="med" len="med"/>
-          </a:ln>
-        </p:spPr>
-        <p:style>
-          <a:lnRef idx="2">
-            <a:schemeClr val="accent1"/>
-          </a:lnRef>
-          <a:fillRef idx="0">
-            <a:schemeClr val="accent1"/>
-          </a:fillRef>
-          <a:effectRef idx="1">
-            <a:schemeClr val="accent1"/>
-          </a:effectRef>
-          <a:fontRef idx="minor">
-            <a:schemeClr val="tx1"/>
-          </a:fontRef>
-        </p:style>
-      </p:cxnSp>
-      <p:sp>
-        <p:nvSpPr>
-          <p:cNvPr id="10" name="Rounded Rectangle 9"/>
+              <a:t>research</a:t>
+            </a:r>
+          </a:p>
+        </p:txBody>
+      </p:sp>
+      <p:sp>
+        <p:nvSpPr>
+          <p:cNvPr id="12" name="TextBox 11"/>
+          <p:cNvSpPr txBox="1"/>
+          <p:nvPr/>
+        </p:nvSpPr>
+        <p:spPr>
+          <a:xfrm>
+            <a:off x="6301740" y="2555760"/>
+            <a:ext cx="2194560" cy="548640"/>
+          </a:xfrm>
+          <a:prstGeom prst="rect">
+            <a:avLst/>
+          </a:prstGeom>
+          <a:noFill/>
+        </p:spPr>
+        <p:txBody>
+          <a:bodyPr wrap="square">
+            <a:spAutoFit/>
+          </a:bodyPr>
+          <a:lstStyle/>
+          <a:p>
+            <a:pPr algn="ctr"/>
+            <a:r>
+              <a:rPr b="1" sz="2000">
+                <a:solidFill>
+                  <a:srgbClr val="DDDDFF"/>
+                </a:solidFill>
+              </a:rPr>
+              <a:t>154×</a:t>
+            </a:r>
+          </a:p>
+        </p:txBody>
+      </p:sp>
+      <p:sp>
+        <p:nvSpPr>
+          <p:cNvPr id="13" name="Rounded Rectangle 12"/>
           <p:cNvSpPr/>
           <p:nvPr/>
         </p:nvSpPr>
         <p:spPr>
           <a:xfrm>
-            <a:off x="5547360" y="1554480"/>
-            <a:ext cx="1097280" cy="731520"/>
+            <a:off x="8816340" y="1463040"/>
+            <a:ext cx="2377440" cy="2194560"/>
           </a:xfrm>
           <a:prstGeom prst="roundRect">
             <a:avLst/>
@@ -4748,10 +5042,8 @@
           <a:solidFill>
             <a:srgbClr val="502379"/>
           </a:solidFill>
-          <a:ln w="12700">
-            <a:solidFill>
-              <a:srgbClr val="502379"/>
-            </a:solidFill>
+          <a:ln>
+            <a:noFill/>
           </a:ln>
         </p:spPr>
         <p:style>
@@ -4769,298 +5061,23 @@
           </a:fontRef>
         </p:style>
         <p:txBody>
-          <a:bodyPr rtlCol="0" anchor="ctr" wrap="square"/>
+          <a:bodyPr rtlCol="0" anchor="ctr"/>
           <a:lstStyle/>
           <a:p>
             <a:pPr algn="ctr"/>
-            <a:r>
-              <a:rPr sz="1200" b="1">
-                <a:solidFill>
-                  <a:srgbClr val="FFFFFF"/>
-                </a:solidFill>
-              </a:rPr>
-              <a:t>Method</a:t>
-            </a:r>
-          </a:p>
-        </p:txBody>
-      </p:sp>
-      <p:cxnSp>
-        <p:nvCxnSpPr>
-          <p:cNvPr id="11" name="Connector 10"/>
-          <p:cNvCxnSpPr/>
-          <p:nvPr/>
-        </p:nvCxnSpPr>
-        <p:spPr>
-          <a:xfrm>
-            <a:off x="6644640" y="1920240"/>
-            <a:ext cx="114300" cy="0"/>
-          </a:xfrm>
-          <a:prstGeom prst="line">
-            <a:avLst/>
-          </a:prstGeom>
-          <a:ln w="27432">
-            <a:solidFill>
-              <a:srgbClr val="7C3A9E"/>
-            </a:solidFill>
-            <a:tailEnd type="triangle" w="med" len="med"/>
-          </a:ln>
-        </p:spPr>
-        <p:style>
-          <a:lnRef idx="2">
-            <a:schemeClr val="accent1"/>
-          </a:lnRef>
-          <a:fillRef idx="0">
-            <a:schemeClr val="accent1"/>
-          </a:fillRef>
-          <a:effectRef idx="1">
-            <a:schemeClr val="accent1"/>
-          </a:effectRef>
-          <a:fontRef idx="minor">
-            <a:schemeClr val="tx1"/>
-          </a:fontRef>
-        </p:style>
-      </p:cxnSp>
-      <p:sp>
-        <p:nvSpPr>
-          <p:cNvPr id="12" name="Rounded Rectangle 11"/>
-          <p:cNvSpPr/>
-          <p:nvPr/>
-        </p:nvSpPr>
-        <p:spPr>
-          <a:xfrm>
-            <a:off x="6758940" y="1554480"/>
-            <a:ext cx="1097280" cy="731520"/>
-          </a:xfrm>
-          <a:prstGeom prst="roundRect">
-            <a:avLst/>
-          </a:prstGeom>
-          <a:solidFill>
-            <a:srgbClr val="7C3A9E"/>
-          </a:solidFill>
-          <a:ln w="12700">
-            <a:solidFill>
-              <a:srgbClr val="7C3A9E"/>
-            </a:solidFill>
-          </a:ln>
-        </p:spPr>
-        <p:style>
-          <a:lnRef idx="1">
-            <a:schemeClr val="accent1"/>
-          </a:lnRef>
-          <a:fillRef idx="3">
-            <a:schemeClr val="accent1"/>
-          </a:fillRef>
-          <a:effectRef idx="2">
-            <a:schemeClr val="accent1"/>
-          </a:effectRef>
-          <a:fontRef idx="minor">
-            <a:schemeClr val="lt1"/>
-          </a:fontRef>
-        </p:style>
-        <p:txBody>
-          <a:bodyPr rtlCol="0" anchor="ctr" wrap="square"/>
-          <a:lstStyle/>
-          <a:p>
-            <a:pPr algn="ctr"/>
-            <a:r>
-              <a:rPr sz="1200" b="1">
-                <a:solidFill>
-                  <a:srgbClr val="FFFFFF"/>
-                </a:solidFill>
-              </a:rPr>
-              <a:t>Findings</a:t>
-            </a:r>
-          </a:p>
-        </p:txBody>
-      </p:sp>
-      <p:cxnSp>
-        <p:nvCxnSpPr>
-          <p:cNvPr id="13" name="Connector 12"/>
-          <p:cNvCxnSpPr/>
-          <p:nvPr/>
-        </p:nvCxnSpPr>
-        <p:spPr>
-          <a:xfrm>
-            <a:off x="7856220" y="1920240"/>
-            <a:ext cx="114300" cy="0"/>
-          </a:xfrm>
-          <a:prstGeom prst="line">
-            <a:avLst/>
-          </a:prstGeom>
-          <a:ln w="27432">
-            <a:solidFill>
-              <a:srgbClr val="7C3A9E"/>
-            </a:solidFill>
-            <a:tailEnd type="triangle" w="med" len="med"/>
-          </a:ln>
-        </p:spPr>
-        <p:style>
-          <a:lnRef idx="2">
-            <a:schemeClr val="accent1"/>
-          </a:lnRef>
-          <a:fillRef idx="0">
-            <a:schemeClr val="accent1"/>
-          </a:fillRef>
-          <a:effectRef idx="1">
-            <a:schemeClr val="accent1"/>
-          </a:effectRef>
-          <a:fontRef idx="minor">
-            <a:schemeClr val="tx1"/>
-          </a:fontRef>
-        </p:style>
-      </p:cxnSp>
-      <p:sp>
-        <p:nvSpPr>
-          <p:cNvPr id="14" name="Rounded Rectangle 13"/>
-          <p:cNvSpPr/>
-          <p:nvPr/>
-        </p:nvSpPr>
-        <p:spPr>
-          <a:xfrm>
-            <a:off x="7970520" y="1554480"/>
-            <a:ext cx="1097280" cy="731520"/>
-          </a:xfrm>
-          <a:prstGeom prst="roundRect">
-            <a:avLst/>
-          </a:prstGeom>
-          <a:solidFill>
-            <a:srgbClr val="502379"/>
-          </a:solidFill>
-          <a:ln w="12700">
-            <a:solidFill>
-              <a:srgbClr val="502379"/>
-            </a:solidFill>
-          </a:ln>
-        </p:spPr>
-        <p:style>
-          <a:lnRef idx="1">
-            <a:schemeClr val="accent1"/>
-          </a:lnRef>
-          <a:fillRef idx="3">
-            <a:schemeClr val="accent1"/>
-          </a:fillRef>
-          <a:effectRef idx="2">
-            <a:schemeClr val="accent1"/>
-          </a:effectRef>
-          <a:fontRef idx="minor">
-            <a:schemeClr val="lt1"/>
-          </a:fontRef>
-        </p:style>
-        <p:txBody>
-          <a:bodyPr rtlCol="0" anchor="ctr" wrap="square"/>
-          <a:lstStyle/>
-          <a:p>
-            <a:pPr algn="ctr"/>
-            <a:r>
-              <a:rPr sz="1200" b="1">
-                <a:solidFill>
-                  <a:srgbClr val="FFFFFF"/>
-                </a:solidFill>
-              </a:rPr>
-              <a:t>Discussion</a:t>
-            </a:r>
-          </a:p>
-        </p:txBody>
-      </p:sp>
-      <p:cxnSp>
-        <p:nvCxnSpPr>
-          <p:cNvPr id="15" name="Connector 14"/>
-          <p:cNvCxnSpPr/>
-          <p:nvPr/>
-        </p:nvCxnSpPr>
-        <p:spPr>
-          <a:xfrm>
-            <a:off x="9067800" y="1920240"/>
-            <a:ext cx="114300" cy="0"/>
-          </a:xfrm>
-          <a:prstGeom prst="line">
-            <a:avLst/>
-          </a:prstGeom>
-          <a:ln w="27432">
-            <a:solidFill>
-              <a:srgbClr val="7C3A9E"/>
-            </a:solidFill>
-            <a:tailEnd type="triangle" w="med" len="med"/>
-          </a:ln>
-        </p:spPr>
-        <p:style>
-          <a:lnRef idx="2">
-            <a:schemeClr val="accent1"/>
-          </a:lnRef>
-          <a:fillRef idx="0">
-            <a:schemeClr val="accent1"/>
-          </a:fillRef>
-          <a:effectRef idx="1">
-            <a:schemeClr val="accent1"/>
-          </a:effectRef>
-          <a:fontRef idx="minor">
-            <a:schemeClr val="tx1"/>
-          </a:fontRef>
-        </p:style>
-      </p:cxnSp>
-      <p:sp>
-        <p:nvSpPr>
-          <p:cNvPr id="16" name="Rounded Rectangle 15"/>
-          <p:cNvSpPr/>
-          <p:nvPr/>
-        </p:nvSpPr>
-        <p:spPr>
-          <a:xfrm>
-            <a:off x="9182100" y="1554480"/>
-            <a:ext cx="1097280" cy="731520"/>
-          </a:xfrm>
-          <a:prstGeom prst="roundRect">
-            <a:avLst/>
-          </a:prstGeom>
-          <a:solidFill>
-            <a:srgbClr val="7C3A9E"/>
-          </a:solidFill>
-          <a:ln w="12700">
-            <a:solidFill>
-              <a:srgbClr val="7C3A9E"/>
-            </a:solidFill>
-          </a:ln>
-        </p:spPr>
-        <p:style>
-          <a:lnRef idx="1">
-            <a:schemeClr val="accent1"/>
-          </a:lnRef>
-          <a:fillRef idx="3">
-            <a:schemeClr val="accent1"/>
-          </a:fillRef>
-          <a:effectRef idx="2">
-            <a:schemeClr val="accent1"/>
-          </a:effectRef>
-          <a:fontRef idx="minor">
-            <a:schemeClr val="lt1"/>
-          </a:fontRef>
-        </p:style>
-        <p:txBody>
-          <a:bodyPr rtlCol="0" anchor="ctr" wrap="square"/>
-          <a:lstStyle/>
-          <a:p>
-            <a:pPr algn="ctr"/>
-            <a:r>
-              <a:rPr sz="1200" b="1">
-                <a:solidFill>
-                  <a:srgbClr val="FFFFFF"/>
-                </a:solidFill>
-              </a:rPr>
-              <a:t>Implications</a:t>
-            </a:r>
-          </a:p>
-        </p:txBody>
-      </p:sp>
-      <p:sp>
-        <p:nvSpPr>
-          <p:cNvPr id="17" name="TextBox 16"/>
+          </a:p>
+        </p:txBody>
+      </p:sp>
+      <p:sp>
+        <p:nvSpPr>
+          <p:cNvPr id="14" name="TextBox 13"/>
           <p:cNvSpPr txBox="1"/>
           <p:nvPr/>
         </p:nvSpPr>
         <p:spPr>
           <a:xfrm>
-            <a:off x="1371600" y="2743200"/>
-            <a:ext cx="9418320" cy="365760"/>
+            <a:off x="8907780" y="1645920"/>
+            <a:ext cx="2194560" cy="731520"/>
           </a:xfrm>
           <a:prstGeom prst="rect">
             <a:avLst/>
@@ -5073,28 +5090,28 @@
           </a:bodyPr>
           <a:lstStyle/>
           <a:p>
-            <a:pPr algn="l"/>
-            <a:r>
-              <a:rPr sz="1600" b="1">
-                <a:solidFill>
-                  <a:srgbClr val="000000"/>
+            <a:pPr algn="ctr"/>
+            <a:r>
+              <a:rPr b="1" sz="2400">
+                <a:solidFill>
+                  <a:srgbClr val="FFFFFF"/>
                 </a:solidFill>
               </a:rPr>
-              <a:t>· Not all abstracts include all 7 elements</a:t>
-            </a:r>
-          </a:p>
-        </p:txBody>
-      </p:sp>
-      <p:sp>
-        <p:nvSpPr>
-          <p:cNvPr id="18" name="TextBox 17"/>
+              <a:t>work</a:t>
+            </a:r>
+          </a:p>
+        </p:txBody>
+      </p:sp>
+      <p:sp>
+        <p:nvSpPr>
+          <p:cNvPr id="15" name="TextBox 14"/>
           <p:cNvSpPr txBox="1"/>
           <p:nvPr/>
         </p:nvSpPr>
         <p:spPr>
           <a:xfrm>
-            <a:off x="1371600" y="3200400"/>
-            <a:ext cx="9418320" cy="365760"/>
+            <a:off x="8907780" y="2555760"/>
+            <a:ext cx="2194560" cy="548640"/>
           </a:xfrm>
           <a:prstGeom prst="rect">
             <a:avLst/>
@@ -5107,71 +5124,28 @@
           </a:bodyPr>
           <a:lstStyle/>
           <a:p>
-            <a:pPr algn="l"/>
-            <a:r>
-              <a:rPr sz="1400" b="1">
-                <a:solidFill>
-                  <a:srgbClr val="666666"/>
+            <a:pPr algn="ctr"/>
+            <a:r>
+              <a:rPr b="1" sz="2000">
+                <a:solidFill>
+                  <a:srgbClr val="DDDDFF"/>
                 </a:solidFill>
               </a:rPr>
-              <a:t>Read Abstract → Decide Relevance → Navigate to section</a:t>
-            </a:r>
-          </a:p>
-        </p:txBody>
-      </p:sp>
-      <p:sp>
-        <p:nvSpPr>
-          <p:cNvPr id="19" name="Rectangle 18"/>
-          <p:cNvSpPr/>
-          <p:nvPr/>
-        </p:nvSpPr>
-        <p:spPr>
-          <a:xfrm>
-            <a:off x="731520" y="5486400"/>
-            <a:ext cx="10515600" cy="640080"/>
-          </a:xfrm>
-          <a:prstGeom prst="rect">
-            <a:avLst/>
-          </a:prstGeom>
-          <a:solidFill>
-            <a:srgbClr val="F5F0FA"/>
-          </a:solidFill>
-          <a:ln>
-            <a:noFill/>
-          </a:ln>
-        </p:spPr>
-        <p:style>
-          <a:lnRef idx="1">
-            <a:schemeClr val="accent1"/>
-          </a:lnRef>
-          <a:fillRef idx="3">
-            <a:schemeClr val="accent1"/>
-          </a:fillRef>
-          <a:effectRef idx="2">
-            <a:schemeClr val="accent1"/>
-          </a:effectRef>
-          <a:fontRef idx="minor">
-            <a:schemeClr val="lt1"/>
-          </a:fontRef>
-        </p:style>
-        <p:txBody>
-          <a:bodyPr rtlCol="0" anchor="ctr"/>
-          <a:lstStyle/>
-          <a:p>
-            <a:pPr algn="ctr"/>
-          </a:p>
-        </p:txBody>
-      </p:sp>
-      <p:sp>
-        <p:nvSpPr>
-          <p:cNvPr id="20" name="TextBox 19"/>
+              <a:t>111×</a:t>
+            </a:r>
+          </a:p>
+        </p:txBody>
+      </p:sp>
+      <p:sp>
+        <p:nvSpPr>
+          <p:cNvPr id="16" name="TextBox 15"/>
           <p:cNvSpPr txBox="1"/>
           <p:nvPr/>
         </p:nvSpPr>
         <p:spPr>
           <a:xfrm>
-            <a:off x="1097280" y="5532120"/>
-            <a:ext cx="10058400" cy="548640"/>
+            <a:off x="914400" y="4206240"/>
+            <a:ext cx="10058400" cy="457200"/>
           </a:xfrm>
           <a:prstGeom prst="rect">
             <a:avLst/>
@@ -5186,19 +5160,19 @@
           <a:p>
             <a:pPr algn="l"/>
             <a:r>
-              <a:rPr sz="1800" b="1">
-                <a:solidFill>
-                  <a:srgbClr val="FF0000"/>
+              <a:rPr b="1" sz="1400">
+                <a:solidFill>
+                  <a:srgbClr val="666666"/>
                 </a:solidFill>
               </a:rPr>
-              <a:t>Know the structure → find what you need fast</a:t>
-            </a:r>
-          </a:p>
-        </p:txBody>
-      </p:sp>
-      <p:sp>
-        <p:nvSpPr>
-          <p:cNvPr id="21" name="TextBox 20"/>
+              <a:t>investigate · examine · analyse · indicate · suggest</a:t>
+            </a:r>
+          </a:p>
+        </p:txBody>
+      </p:sp>
+      <p:sp>
+        <p:nvSpPr>
+          <p:cNvPr id="17" name="TextBox 16"/>
           <p:cNvSpPr txBox="1"/>
           <p:nvPr/>
         </p:nvSpPr>
@@ -5328,7 +5302,7 @@
                   <a:srgbClr val="000000"/>
                 </a:solidFill>
               </a:rPr>
-              <a:t>Common language in abstracts</a:t>
+              <a:t>Sentence Functions</a:t>
             </a:r>
           </a:p>
         </p:txBody>
@@ -5341,8 +5315,8 @@
         </p:nvSpPr>
         <p:spPr>
           <a:xfrm>
-            <a:off x="1432560" y="1554480"/>
-            <a:ext cx="2194560" cy="914400"/>
+            <a:off x="1341120" y="1828800"/>
+            <a:ext cx="1828800" cy="731520"/>
           </a:xfrm>
           <a:prstGeom prst="roundRect">
             <a:avLst/>
@@ -5350,10 +5324,8 @@
           <a:solidFill>
             <a:srgbClr val="7C3A9E"/>
           </a:solidFill>
-          <a:ln w="12700">
-            <a:solidFill>
-              <a:srgbClr val="7C3A9E"/>
-            </a:solidFill>
+          <a:ln>
+            <a:noFill/>
           </a:ln>
         </p:spPr>
         <p:style>
@@ -5375,6 +5347,14 @@
           <a:lstStyle/>
           <a:p>
             <a:pPr algn="ctr"/>
+            <a:r>
+              <a:rPr sz="1600" b="1">
+                <a:solidFill>
+                  <a:srgbClr val="FFFFFF"/>
+                </a:solidFill>
+              </a:rPr>
+              <a:t>Context</a:t>
+            </a:r>
           </a:p>
         </p:txBody>
       </p:sp>
@@ -5386,8 +5366,8 @@
         </p:nvSpPr>
         <p:spPr>
           <a:xfrm>
-            <a:off x="1524000" y="1645920"/>
-            <a:ext cx="2011680" cy="457200"/>
+            <a:off x="1432560" y="2743200"/>
+            <a:ext cx="1645920" cy="731520"/>
           </a:xfrm>
           <a:prstGeom prst="rect">
             <a:avLst/>
@@ -5402,50 +5382,52 @@
           <a:p>
             <a:pPr algn="ctr"/>
             <a:r>
-              <a:rPr sz="2000" b="1">
-                <a:solidFill>
-                  <a:srgbClr val="FFFFFF"/>
+              <a:rPr b="1" sz="1200">
+                <a:solidFill>
+                  <a:srgbClr val="666666"/>
                 </a:solidFill>
               </a:rPr>
-              <a:t>"paper"</a:t>
-            </a:r>
-          </a:p>
-        </p:txBody>
-      </p:sp>
-      <p:sp>
-        <p:nvSpPr>
-          <p:cNvPr id="6" name="TextBox 5"/>
-          <p:cNvSpPr txBox="1"/>
-          <p:nvPr/>
-        </p:nvSpPr>
-        <p:spPr>
-          <a:xfrm>
-            <a:off x="1524000" y="2011680"/>
-            <a:ext cx="2011680" cy="457200"/>
-          </a:xfrm>
-          <a:prstGeom prst="rect">
-            <a:avLst/>
-          </a:prstGeom>
-          <a:noFill/>
-        </p:spPr>
-        <p:txBody>
-          <a:bodyPr wrap="square">
-            <a:spAutoFit/>
-          </a:bodyPr>
-          <a:lstStyle/>
-          <a:p>
-            <a:pPr algn="ctr"/>
-            <a:r>
-              <a:rPr sz="2000" b="1">
-                <a:solidFill>
-                  <a:srgbClr val="DDDDFF"/>
-                </a:solidFill>
-              </a:rPr>
-              <a:t>499×</a:t>
-            </a:r>
-          </a:p>
-        </p:txBody>
-      </p:sp>
+              <a:t>Background</a:t>
+            </a:r>
+          </a:p>
+        </p:txBody>
+      </p:sp>
+      <p:cxnSp>
+        <p:nvCxnSpPr>
+          <p:cNvPr id="6" name="Connector 5"/>
+          <p:cNvCxnSpPr/>
+          <p:nvPr/>
+        </p:nvCxnSpPr>
+        <p:spPr>
+          <a:xfrm>
+            <a:off x="3169920" y="2194560"/>
+            <a:ext cx="91440" cy="0"/>
+          </a:xfrm>
+          <a:prstGeom prst="line">
+            <a:avLst/>
+          </a:prstGeom>
+          <a:ln w="27432">
+            <a:solidFill>
+              <a:srgbClr val="7C3A9E"/>
+            </a:solidFill>
+            <a:tailEnd type="triangle" w="med" len="med"/>
+          </a:ln>
+        </p:spPr>
+        <p:style>
+          <a:lnRef idx="2">
+            <a:schemeClr val="accent1"/>
+          </a:lnRef>
+          <a:fillRef idx="0">
+            <a:schemeClr val="accent1"/>
+          </a:fillRef>
+          <a:effectRef idx="1">
+            <a:schemeClr val="accent1"/>
+          </a:effectRef>
+          <a:fontRef idx="minor">
+            <a:schemeClr val="tx1"/>
+          </a:fontRef>
+        </p:style>
+      </p:cxnSp>
       <p:sp>
         <p:nvSpPr>
           <p:cNvPr id="7" name="Rounded Rectangle 6"/>
@@ -5454,19 +5436,17 @@
         </p:nvSpPr>
         <p:spPr>
           <a:xfrm>
-            <a:off x="3810000" y="1554480"/>
-            <a:ext cx="2194560" cy="914400"/>
+            <a:off x="3261360" y="1828800"/>
+            <a:ext cx="1828800" cy="731520"/>
           </a:xfrm>
           <a:prstGeom prst="roundRect">
             <a:avLst/>
           </a:prstGeom>
           <a:solidFill>
-            <a:srgbClr val="502379"/>
+            <a:srgbClr val="E86A17"/>
           </a:solidFill>
-          <a:ln w="12700">
-            <a:solidFill>
-              <a:srgbClr val="502379"/>
-            </a:solidFill>
+          <a:ln>
+            <a:noFill/>
           </a:ln>
         </p:spPr>
         <p:style>
@@ -5488,6 +5468,14 @@
           <a:lstStyle/>
           <a:p>
             <a:pPr algn="ctr"/>
+            <a:r>
+              <a:rPr sz="1600" b="1">
+                <a:solidFill>
+                  <a:srgbClr val="FFFFFF"/>
+                </a:solidFill>
+              </a:rPr>
+              <a:t>Aim</a:t>
+            </a:r>
           </a:p>
         </p:txBody>
       </p:sp>
@@ -5499,8 +5487,8 @@
         </p:nvSpPr>
         <p:spPr>
           <a:xfrm>
-            <a:off x="3901440" y="1645920"/>
-            <a:ext cx="2011680" cy="457200"/>
+            <a:off x="3352800" y="2743200"/>
+            <a:ext cx="1645920" cy="731520"/>
           </a:xfrm>
           <a:prstGeom prst="rect">
             <a:avLst/>
@@ -5515,71 +5503,80 @@
           <a:p>
             <a:pPr algn="ctr"/>
             <a:r>
-              <a:rPr sz="2000" b="1">
-                <a:solidFill>
-                  <a:srgbClr val="FFFFFF"/>
+              <a:rPr b="1" sz="1200">
+                <a:solidFill>
+                  <a:srgbClr val="666666"/>
                 </a:solidFill>
               </a:rPr>
-              <a:t>"study"</a:t>
-            </a:r>
-          </a:p>
-        </p:txBody>
-      </p:sp>
-      <p:sp>
-        <p:nvSpPr>
-          <p:cNvPr id="9" name="TextBox 8"/>
-          <p:cNvSpPr txBox="1"/>
-          <p:nvPr/>
-        </p:nvSpPr>
-        <p:spPr>
-          <a:xfrm>
-            <a:off x="3901440" y="2011680"/>
-            <a:ext cx="2011680" cy="457200"/>
-          </a:xfrm>
-          <a:prstGeom prst="rect">
-            <a:avLst/>
-          </a:prstGeom>
-          <a:noFill/>
-        </p:spPr>
-        <p:txBody>
-          <a:bodyPr wrap="square">
-            <a:spAutoFit/>
-          </a:bodyPr>
-          <a:lstStyle/>
-          <a:p>
-            <a:pPr algn="ctr"/>
-            <a:r>
-              <a:rPr sz="2000" b="1">
-                <a:solidFill>
-                  <a:srgbClr val="DDDDFF"/>
+              <a:t>What they</a:t>
+            </a:r>
+            <a:br/>
+            <a:r>
+              <a:rPr b="1">
+                <a:solidFill>
+                  <a:srgbClr val="666666"/>
                 </a:solidFill>
               </a:rPr>
-              <a:t>170×</a:t>
-            </a:r>
-          </a:p>
-        </p:txBody>
-      </p:sp>
-      <p:sp>
-        <p:nvSpPr>
-          <p:cNvPr id="10" name="Rounded Rectangle 9"/>
-          <p:cNvSpPr/>
-          <p:nvPr/>
-        </p:nvSpPr>
-        <p:spPr>
-          <a:xfrm>
-            <a:off x="6187440" y="1554480"/>
-            <a:ext cx="2194560" cy="914400"/>
-          </a:xfrm>
-          <a:prstGeom prst="roundRect">
-            <a:avLst/>
-          </a:prstGeom>
-          <a:solidFill>
-            <a:srgbClr val="7C3A9E"/>
-          </a:solidFill>
-          <a:ln w="12700">
+              <a:t>did</a:t>
+            </a:r>
+          </a:p>
+        </p:txBody>
+      </p:sp>
+      <p:cxnSp>
+        <p:nvCxnSpPr>
+          <p:cNvPr id="9" name="Connector 8"/>
+          <p:cNvCxnSpPr/>
+          <p:nvPr/>
+        </p:nvCxnSpPr>
+        <p:spPr>
+          <a:xfrm>
+            <a:off x="5090160" y="2194560"/>
+            <a:ext cx="91440" cy="0"/>
+          </a:xfrm>
+          <a:prstGeom prst="line">
+            <a:avLst/>
+          </a:prstGeom>
+          <a:ln w="27432">
             <a:solidFill>
               <a:srgbClr val="7C3A9E"/>
             </a:solidFill>
+            <a:tailEnd type="triangle" w="med" len="med"/>
+          </a:ln>
+        </p:spPr>
+        <p:style>
+          <a:lnRef idx="2">
+            <a:schemeClr val="accent1"/>
+          </a:lnRef>
+          <a:fillRef idx="0">
+            <a:schemeClr val="accent1"/>
+          </a:fillRef>
+          <a:effectRef idx="1">
+            <a:schemeClr val="accent1"/>
+          </a:effectRef>
+          <a:fontRef idx="minor">
+            <a:schemeClr val="tx1"/>
+          </a:fontRef>
+        </p:style>
+      </p:cxnSp>
+      <p:sp>
+        <p:nvSpPr>
+          <p:cNvPr id="10" name="Rounded Rectangle 9"/>
+          <p:cNvSpPr/>
+          <p:nvPr/>
+        </p:nvSpPr>
+        <p:spPr>
+          <a:xfrm>
+            <a:off x="5181600" y="1828800"/>
+            <a:ext cx="1828800" cy="731520"/>
+          </a:xfrm>
+          <a:prstGeom prst="roundRect">
+            <a:avLst/>
+          </a:prstGeom>
+          <a:solidFill>
+            <a:srgbClr val="502379"/>
+          </a:solidFill>
+          <a:ln>
+            <a:noFill/>
           </a:ln>
         </p:spPr>
         <p:style>
@@ -5601,6 +5598,14 @@
           <a:lstStyle/>
           <a:p>
             <a:pPr algn="ctr"/>
+            <a:r>
+              <a:rPr sz="1600" b="1">
+                <a:solidFill>
+                  <a:srgbClr val="FFFFFF"/>
+                </a:solidFill>
+              </a:rPr>
+              <a:t>Method</a:t>
+            </a:r>
           </a:p>
         </p:txBody>
       </p:sp>
@@ -5612,8 +5617,8 @@
         </p:nvSpPr>
         <p:spPr>
           <a:xfrm>
-            <a:off x="6278880" y="1645920"/>
-            <a:ext cx="2011680" cy="457200"/>
+            <a:off x="5273040" y="2743200"/>
+            <a:ext cx="1645920" cy="731520"/>
           </a:xfrm>
           <a:prstGeom prst="rect">
             <a:avLst/>
@@ -5628,50 +5633,61 @@
           <a:p>
             <a:pPr algn="ctr"/>
             <a:r>
-              <a:rPr sz="2000" b="1">
-                <a:solidFill>
-                  <a:srgbClr val="FFFFFF"/>
+              <a:rPr b="1" sz="1200">
+                <a:solidFill>
+                  <a:srgbClr val="666666"/>
                 </a:solidFill>
               </a:rPr>
-              <a:t>"research"</a:t>
-            </a:r>
-          </a:p>
-        </p:txBody>
-      </p:sp>
-      <p:sp>
-        <p:nvSpPr>
-          <p:cNvPr id="12" name="TextBox 11"/>
-          <p:cNvSpPr txBox="1"/>
-          <p:nvPr/>
-        </p:nvSpPr>
-        <p:spPr>
-          <a:xfrm>
-            <a:off x="6278880" y="2011680"/>
-            <a:ext cx="2011680" cy="457200"/>
-          </a:xfrm>
-          <a:prstGeom prst="rect">
-            <a:avLst/>
-          </a:prstGeom>
-          <a:noFill/>
-        </p:spPr>
-        <p:txBody>
-          <a:bodyPr wrap="square">
-            <a:spAutoFit/>
-          </a:bodyPr>
-          <a:lstStyle/>
-          <a:p>
-            <a:pPr algn="ctr"/>
-            <a:r>
-              <a:rPr sz="2000" b="1">
-                <a:solidFill>
-                  <a:srgbClr val="DDDDFF"/>
+              <a:t>How they</a:t>
+            </a:r>
+            <a:br/>
+            <a:r>
+              <a:rPr b="1">
+                <a:solidFill>
+                  <a:srgbClr val="666666"/>
                 </a:solidFill>
               </a:rPr>
-              <a:t>154×</a:t>
-            </a:r>
-          </a:p>
-        </p:txBody>
-      </p:sp>
+              <a:t>did it</a:t>
+            </a:r>
+          </a:p>
+        </p:txBody>
+      </p:sp>
+      <p:cxnSp>
+        <p:nvCxnSpPr>
+          <p:cNvPr id="12" name="Connector 11"/>
+          <p:cNvCxnSpPr/>
+          <p:nvPr/>
+        </p:nvCxnSpPr>
+        <p:spPr>
+          <a:xfrm>
+            <a:off x="7010400" y="2194560"/>
+            <a:ext cx="91440" cy="0"/>
+          </a:xfrm>
+          <a:prstGeom prst="line">
+            <a:avLst/>
+          </a:prstGeom>
+          <a:ln w="27432">
+            <a:solidFill>
+              <a:srgbClr val="7C3A9E"/>
+            </a:solidFill>
+            <a:tailEnd type="triangle" w="med" len="med"/>
+          </a:ln>
+        </p:spPr>
+        <p:style>
+          <a:lnRef idx="2">
+            <a:schemeClr val="accent1"/>
+          </a:lnRef>
+          <a:fillRef idx="0">
+            <a:schemeClr val="accent1"/>
+          </a:fillRef>
+          <a:effectRef idx="1">
+            <a:schemeClr val="accent1"/>
+          </a:effectRef>
+          <a:fontRef idx="minor">
+            <a:schemeClr val="tx1"/>
+          </a:fontRef>
+        </p:style>
+      </p:cxnSp>
       <p:sp>
         <p:nvSpPr>
           <p:cNvPr id="13" name="Rounded Rectangle 12"/>
@@ -5680,19 +5696,17 @@
         </p:nvSpPr>
         <p:spPr>
           <a:xfrm>
-            <a:off x="8564880" y="1554480"/>
-            <a:ext cx="2194560" cy="914400"/>
+            <a:off x="7101840" y="1828800"/>
+            <a:ext cx="1828800" cy="731520"/>
           </a:xfrm>
           <a:prstGeom prst="roundRect">
             <a:avLst/>
           </a:prstGeom>
           <a:solidFill>
-            <a:srgbClr val="502379"/>
+            <a:srgbClr val="2E864B"/>
           </a:solidFill>
-          <a:ln w="12700">
-            <a:solidFill>
-              <a:srgbClr val="502379"/>
-            </a:solidFill>
+          <a:ln>
+            <a:noFill/>
           </a:ln>
         </p:spPr>
         <p:style>
@@ -5714,6 +5728,14 @@
           <a:lstStyle/>
           <a:p>
             <a:pPr algn="ctr"/>
+            <a:r>
+              <a:rPr sz="1600" b="1">
+                <a:solidFill>
+                  <a:srgbClr val="FFFFFF"/>
+                </a:solidFill>
+              </a:rPr>
+              <a:t>Findings</a:t>
+            </a:r>
           </a:p>
         </p:txBody>
       </p:sp>
@@ -5725,8 +5747,8 @@
         </p:nvSpPr>
         <p:spPr>
           <a:xfrm>
-            <a:off x="8656320" y="1645920"/>
-            <a:ext cx="2011680" cy="457200"/>
+            <a:off x="7193280" y="2743200"/>
+            <a:ext cx="1645920" cy="731520"/>
           </a:xfrm>
           <a:prstGeom prst="rect">
             <a:avLst/>
@@ -5741,168 +5763,77 @@
           <a:p>
             <a:pPr algn="ctr"/>
             <a:r>
-              <a:rPr sz="2000" b="1">
-                <a:solidFill>
-                  <a:srgbClr val="FFFFFF"/>
+              <a:rPr b="1" sz="1200">
+                <a:solidFill>
+                  <a:srgbClr val="666666"/>
                 </a:solidFill>
               </a:rPr>
-              <a:t>"work"</a:t>
-            </a:r>
-          </a:p>
-        </p:txBody>
-      </p:sp>
-      <p:sp>
-        <p:nvSpPr>
-          <p:cNvPr id="15" name="TextBox 14"/>
-          <p:cNvSpPr txBox="1"/>
-          <p:nvPr/>
-        </p:nvSpPr>
-        <p:spPr>
-          <a:xfrm>
-            <a:off x="8656320" y="2011680"/>
-            <a:ext cx="2011680" cy="457200"/>
-          </a:xfrm>
-          <a:prstGeom prst="rect">
-            <a:avLst/>
-          </a:prstGeom>
-          <a:noFill/>
-        </p:spPr>
-        <p:txBody>
-          <a:bodyPr wrap="square">
-            <a:spAutoFit/>
-          </a:bodyPr>
-          <a:lstStyle/>
-          <a:p>
-            <a:pPr algn="ctr"/>
-            <a:r>
-              <a:rPr sz="2000" b="1">
-                <a:solidFill>
-                  <a:srgbClr val="DDDDFF"/>
+              <a:t>What they</a:t>
+            </a:r>
+            <a:br/>
+            <a:r>
+              <a:rPr b="1">
+                <a:solidFill>
+                  <a:srgbClr val="666666"/>
                 </a:solidFill>
               </a:rPr>
-              <a:t>111×</a:t>
-            </a:r>
-          </a:p>
-        </p:txBody>
-      </p:sp>
-      <p:sp>
-        <p:nvSpPr>
-          <p:cNvPr id="16" name="TextBox 15"/>
-          <p:cNvSpPr txBox="1"/>
-          <p:nvPr/>
-        </p:nvSpPr>
-        <p:spPr>
-          <a:xfrm>
-            <a:off x="1371600" y="2926080"/>
-            <a:ext cx="9418320" cy="365760"/>
-          </a:xfrm>
-          <a:prstGeom prst="rect">
-            <a:avLst/>
-          </a:prstGeom>
-          <a:noFill/>
-        </p:spPr>
-        <p:txBody>
-          <a:bodyPr wrap="square">
-            <a:spAutoFit/>
-          </a:bodyPr>
-          <a:lstStyle/>
-          <a:p>
-            <a:pPr algn="l"/>
-            <a:r>
-              <a:rPr sz="1400" b="1">
-                <a:solidFill>
-                  <a:srgbClr val="000000"/>
-                </a:solidFill>
-              </a:rPr>
-              <a:t>● investigate · examine · analyse · indicate · suggest</a:t>
-            </a:r>
-          </a:p>
-        </p:txBody>
-      </p:sp>
-      <p:sp>
-        <p:nvSpPr>
-          <p:cNvPr id="17" name="TextBox 16"/>
-          <p:cNvSpPr txBox="1"/>
-          <p:nvPr/>
-        </p:nvSpPr>
-        <p:spPr>
-          <a:xfrm>
-            <a:off x="1371600" y="3291840"/>
-            <a:ext cx="9418320" cy="365760"/>
-          </a:xfrm>
-          <a:prstGeom prst="rect">
-            <a:avLst/>
-          </a:prstGeom>
-          <a:noFill/>
-        </p:spPr>
-        <p:txBody>
-          <a:bodyPr wrap="square">
-            <a:spAutoFit/>
-          </a:bodyPr>
-          <a:lstStyle/>
-          <a:p>
-            <a:pPr algn="l"/>
-            <a:r>
-              <a:rPr sz="1400" b="1">
-                <a:solidFill>
-                  <a:srgbClr val="000000"/>
-                </a:solidFill>
-              </a:rPr>
-              <a:t>● High lexical density → compact &amp; information-rich</a:t>
-            </a:r>
-          </a:p>
-        </p:txBody>
-      </p:sp>
-      <p:sp>
-        <p:nvSpPr>
-          <p:cNvPr id="18" name="TextBox 17"/>
-          <p:cNvSpPr txBox="1"/>
-          <p:nvPr/>
-        </p:nvSpPr>
-        <p:spPr>
-          <a:xfrm>
-            <a:off x="1371600" y="3840480"/>
-            <a:ext cx="9418320" cy="365760"/>
-          </a:xfrm>
-          <a:prstGeom prst="rect">
-            <a:avLst/>
-          </a:prstGeom>
-          <a:noFill/>
-        </p:spPr>
-        <p:txBody>
-          <a:bodyPr wrap="square">
-            <a:spAutoFit/>
-          </a:bodyPr>
-          <a:lstStyle/>
-          <a:p>
-            <a:pPr algn="l"/>
-            <a:r>
-              <a:rPr sz="1400" b="1">
-                <a:solidFill>
-                  <a:srgbClr val="666666"/>
-                </a:solidFill>
-              </a:rPr>
-              <a:t>→ Orasan (2009): 473 abstracts analysed</a:t>
-            </a:r>
-          </a:p>
-        </p:txBody>
-      </p:sp>
-      <p:sp>
-        <p:nvSpPr>
-          <p:cNvPr id="19" name="Rectangle 18"/>
+              <a:t>found</a:t>
+            </a:r>
+          </a:p>
+        </p:txBody>
+      </p:sp>
+      <p:cxnSp>
+        <p:nvCxnSpPr>
+          <p:cNvPr id="15" name="Connector 14"/>
+          <p:cNvCxnSpPr/>
+          <p:nvPr/>
+        </p:nvCxnSpPr>
+        <p:spPr>
+          <a:xfrm>
+            <a:off x="8930640" y="2194560"/>
+            <a:ext cx="91440" cy="0"/>
+          </a:xfrm>
+          <a:prstGeom prst="line">
+            <a:avLst/>
+          </a:prstGeom>
+          <a:ln w="27432">
+            <a:solidFill>
+              <a:srgbClr val="7C3A9E"/>
+            </a:solidFill>
+            <a:tailEnd type="triangle" w="med" len="med"/>
+          </a:ln>
+        </p:spPr>
+        <p:style>
+          <a:lnRef idx="2">
+            <a:schemeClr val="accent1"/>
+          </a:lnRef>
+          <a:fillRef idx="0">
+            <a:schemeClr val="accent1"/>
+          </a:fillRef>
+          <a:effectRef idx="1">
+            <a:schemeClr val="accent1"/>
+          </a:effectRef>
+          <a:fontRef idx="minor">
+            <a:schemeClr val="tx1"/>
+          </a:fontRef>
+        </p:style>
+      </p:cxnSp>
+      <p:sp>
+        <p:nvSpPr>
+          <p:cNvPr id="16" name="Rounded Rectangle 15"/>
           <p:cNvSpPr/>
           <p:nvPr/>
         </p:nvSpPr>
         <p:spPr>
           <a:xfrm>
-            <a:off x="731520" y="5486400"/>
-            <a:ext cx="10515600" cy="640080"/>
-          </a:xfrm>
-          <a:prstGeom prst="rect">
+            <a:off x="9022080" y="1828800"/>
+            <a:ext cx="1828800" cy="731520"/>
+          </a:xfrm>
+          <a:prstGeom prst="roundRect">
             <a:avLst/>
           </a:prstGeom>
           <a:solidFill>
-            <a:srgbClr val="F5F0FA"/>
+            <a:srgbClr val="7C3A9E"/>
           </a:solidFill>
           <a:ln>
             <a:noFill/>
@@ -5923,23 +5854,31 @@
           </a:fontRef>
         </p:style>
         <p:txBody>
-          <a:bodyPr rtlCol="0" anchor="ctr"/>
+          <a:bodyPr rtlCol="0" anchor="ctr" wrap="square"/>
           <a:lstStyle/>
           <a:p>
             <a:pPr algn="ctr"/>
-          </a:p>
-        </p:txBody>
-      </p:sp>
-      <p:sp>
-        <p:nvSpPr>
-          <p:cNvPr id="20" name="TextBox 19"/>
+            <a:r>
+              <a:rPr sz="1600" b="1">
+                <a:solidFill>
+                  <a:srgbClr val="FFFFFF"/>
+                </a:solidFill>
+              </a:rPr>
+              <a:t>Implication</a:t>
+            </a:r>
+          </a:p>
+        </p:txBody>
+      </p:sp>
+      <p:sp>
+        <p:nvSpPr>
+          <p:cNvPr id="17" name="TextBox 16"/>
           <p:cNvSpPr txBox="1"/>
           <p:nvPr/>
         </p:nvSpPr>
         <p:spPr>
           <a:xfrm>
-            <a:off x="1097280" y="5532120"/>
-            <a:ext cx="10058400" cy="548640"/>
+            <a:off x="9113520" y="2743200"/>
+            <a:ext cx="1645920" cy="731520"/>
           </a:xfrm>
           <a:prstGeom prst="rect">
             <a:avLst/>
@@ -5952,21 +5891,64 @@
           </a:bodyPr>
           <a:lstStyle/>
           <a:p>
+            <a:pPr algn="ctr"/>
+            <a:r>
+              <a:rPr b="1" sz="1200">
+                <a:solidFill>
+                  <a:srgbClr val="666666"/>
+                </a:solidFill>
+              </a:rPr>
+              <a:t>Why it</a:t>
+            </a:r>
+            <a:br/>
+            <a:r>
+              <a:rPr b="1">
+                <a:solidFill>
+                  <a:srgbClr val="666666"/>
+                </a:solidFill>
+              </a:rPr>
+              <a:t>matters</a:t>
+            </a:r>
+          </a:p>
+        </p:txBody>
+      </p:sp>
+      <p:sp>
+        <p:nvSpPr>
+          <p:cNvPr id="18" name="TextBox 17"/>
+          <p:cNvSpPr txBox="1"/>
+          <p:nvPr/>
+        </p:nvSpPr>
+        <p:spPr>
+          <a:xfrm>
+            <a:off x="914400" y="4019280"/>
+            <a:ext cx="10058400" cy="457200"/>
+          </a:xfrm>
+          <a:prstGeom prst="rect">
+            <a:avLst/>
+          </a:prstGeom>
+          <a:noFill/>
+        </p:spPr>
+        <p:txBody>
+          <a:bodyPr wrap="square">
+            <a:spAutoFit/>
+          </a:bodyPr>
+          <a:lstStyle/>
+          <a:p>
             <a:pPr algn="l"/>
             <a:r>
-              <a:rPr sz="1800" b="1">
-                <a:solidFill>
-                  <a:srgbClr val="FF0000"/>
+              <a:rPr b="1" sz="1600">
+                <a:solidFill>
+                  <a:srgbClr val="000000"/>
                 </a:solidFill>
               </a:rPr>
-              <a:t>Recognize patterns → faster comprehension</a:t>
-            </a:r>
-          </a:p>
-        </p:txBody>
-      </p:sp>
-      <p:sp>
-        <p:nvSpPr>
-          <p:cNvPr id="21" name="TextBox 20"/>
+              <a:t>Each sentence = one function  →  decode systematically</a:t>
+            </a:r>
+          </a:p>
+        </p:txBody>
+      </p:sp>
+      <p:sp>
+        <p:nvSpPr>
+          <p:cNvPr id="19" name="TextBox 18"/>
           <p:cNvSpPr txBox="1"/>
           <p:nvPr/>
         </p:nvSpPr>
@@ -6096,32 +6078,30 @@
                   <a:srgbClr val="000000"/>
                 </a:solidFill>
               </a:rPr>
-              <a:t>Sentence functions in abstracts</a:t>
-            </a:r>
-          </a:p>
-        </p:txBody>
-      </p:sp>
-      <p:sp>
-        <p:nvSpPr>
-          <p:cNvPr id="4" name="Rounded Rectangle 3"/>
+              <a:t>Be Assessment-Ready</a:t>
+            </a:r>
+          </a:p>
+        </p:txBody>
+      </p:sp>
+      <p:sp>
+        <p:nvSpPr>
+          <p:cNvPr id="4" name="Rectangle 3"/>
           <p:cNvSpPr/>
           <p:nvPr/>
         </p:nvSpPr>
         <p:spPr>
           <a:xfrm>
-            <a:off x="1371600" y="1371600"/>
-            <a:ext cx="1828800" cy="731520"/>
-          </a:xfrm>
-          <a:prstGeom prst="roundRect">
+            <a:off x="914400" y="1371600"/>
+            <a:ext cx="137160" cy="914400"/>
+          </a:xfrm>
+          <a:prstGeom prst="rect">
             <a:avLst/>
           </a:prstGeom>
           <a:solidFill>
             <a:srgbClr val="7C3A9E"/>
           </a:solidFill>
-          <a:ln w="12700">
-            <a:solidFill>
-              <a:srgbClr val="7C3A9E"/>
-            </a:solidFill>
+          <a:ln>
+            <a:noFill/>
           </a:ln>
         </p:spPr>
         <p:style>
@@ -6139,42 +6119,134 @@
           </a:fontRef>
         </p:style>
         <p:txBody>
-          <a:bodyPr rtlCol="0" anchor="ctr" wrap="square"/>
+          <a:bodyPr rtlCol="0" anchor="ctr"/>
           <a:lstStyle/>
           <a:p>
             <a:pPr algn="ctr"/>
-            <a:r>
-              <a:rPr sz="1400" b="1">
-                <a:solidFill>
-                  <a:srgbClr val="FFFFFF"/>
+          </a:p>
+        </p:txBody>
+      </p:sp>
+      <p:sp>
+        <p:nvSpPr>
+          <p:cNvPr id="5" name="TextBox 4"/>
+          <p:cNvSpPr txBox="1"/>
+          <p:nvPr/>
+        </p:nvSpPr>
+        <p:spPr>
+          <a:xfrm>
+            <a:off x="1276320" y="1463040"/>
+            <a:ext cx="822960" cy="731520"/>
+          </a:xfrm>
+          <a:prstGeom prst="rect">
+            <a:avLst/>
+          </a:prstGeom>
+          <a:noFill/>
+        </p:spPr>
+        <p:txBody>
+          <a:bodyPr wrap="square">
+            <a:spAutoFit/>
+          </a:bodyPr>
+          <a:lstStyle/>
+          <a:p>
+            <a:pPr algn="ctr"/>
+            <a:r>
+              <a:rPr b="1" sz="3200">
+                <a:solidFill>
+                  <a:srgbClr val="000000"/>
                 </a:solidFill>
               </a:rPr>
-              <a:t>Context</a:t>
-            </a:r>
-          </a:p>
-        </p:txBody>
-      </p:sp>
-      <p:sp>
-        <p:nvSpPr>
-          <p:cNvPr id="5" name="Rounded Rectangle 4"/>
+              <a:t>📖</a:t>
+            </a:r>
+          </a:p>
+        </p:txBody>
+      </p:sp>
+      <p:sp>
+        <p:nvSpPr>
+          <p:cNvPr id="6" name="TextBox 5"/>
+          <p:cNvSpPr txBox="1"/>
+          <p:nvPr/>
+        </p:nvSpPr>
+        <p:spPr>
+          <a:xfrm>
+            <a:off x="2286000" y="1463040"/>
+            <a:ext cx="7315200" cy="457200"/>
+          </a:xfrm>
+          <a:prstGeom prst="rect">
+            <a:avLst/>
+          </a:prstGeom>
+          <a:noFill/>
+        </p:spPr>
+        <p:txBody>
+          <a:bodyPr wrap="square">
+            <a:spAutoFit/>
+          </a:bodyPr>
+          <a:lstStyle/>
+          <a:p>
+            <a:pPr algn="l"/>
+            <a:r>
+              <a:rPr b="1" sz="1800">
+                <a:solidFill>
+                  <a:srgbClr val="000000"/>
+                </a:solidFill>
+              </a:rPr>
+              <a:t>Know abstract structure</a:t>
+            </a:r>
+          </a:p>
+        </p:txBody>
+      </p:sp>
+      <p:sp>
+        <p:nvSpPr>
+          <p:cNvPr id="7" name="TextBox 6"/>
+          <p:cNvSpPr txBox="1"/>
+          <p:nvPr/>
+        </p:nvSpPr>
+        <p:spPr>
+          <a:xfrm>
+            <a:off x="2286000" y="1901952"/>
+            <a:ext cx="7315200" cy="365760"/>
+          </a:xfrm>
+          <a:prstGeom prst="rect">
+            <a:avLst/>
+          </a:prstGeom>
+          <a:noFill/>
+        </p:spPr>
+        <p:txBody>
+          <a:bodyPr wrap="square">
+            <a:spAutoFit/>
+          </a:bodyPr>
+          <a:lstStyle/>
+          <a:p>
+            <a:pPr algn="l"/>
+            <a:r>
+              <a:rPr b="1" sz="1400">
+                <a:solidFill>
+                  <a:srgbClr val="666666"/>
+                </a:solidFill>
+              </a:rPr>
+              <a:t>7 elements + functions</a:t>
+            </a:r>
+          </a:p>
+        </p:txBody>
+      </p:sp>
+      <p:sp>
+        <p:nvSpPr>
+          <p:cNvPr id="8" name="Rectangle 7"/>
           <p:cNvSpPr/>
           <p:nvPr/>
         </p:nvSpPr>
         <p:spPr>
           <a:xfrm>
-            <a:off x="3566160" y="1371600"/>
-            <a:ext cx="1828800" cy="731520"/>
-          </a:xfrm>
-          <a:prstGeom prst="roundRect">
+            <a:off x="914400" y="2468880"/>
+            <a:ext cx="137160" cy="914400"/>
+          </a:xfrm>
+          <a:prstGeom prst="rect">
             <a:avLst/>
           </a:prstGeom>
           <a:solidFill>
-            <a:srgbClr val="7C3A9E"/>
+            <a:srgbClr val="E86A17"/>
           </a:solidFill>
-          <a:ln w="12700">
-            <a:solidFill>
-              <a:srgbClr val="7C3A9E"/>
-            </a:solidFill>
+          <a:ln>
+            <a:noFill/>
           </a:ln>
         </p:spPr>
         <p:style>
@@ -6192,334 +6264,23 @@
           </a:fontRef>
         </p:style>
         <p:txBody>
-          <a:bodyPr rtlCol="0" anchor="ctr" wrap="square"/>
+          <a:bodyPr rtlCol="0" anchor="ctr"/>
           <a:lstStyle/>
           <a:p>
             <a:pPr algn="ctr"/>
-            <a:r>
-              <a:rPr sz="1400" b="1">
-                <a:solidFill>
-                  <a:srgbClr val="FFFFFF"/>
-                </a:solidFill>
-              </a:rPr>
-              <a:t>Aim / Purpose</a:t>
-            </a:r>
-          </a:p>
-        </p:txBody>
-      </p:sp>
-      <p:sp>
-        <p:nvSpPr>
-          <p:cNvPr id="6" name="Rounded Rectangle 5"/>
-          <p:cNvSpPr/>
-          <p:nvPr/>
-        </p:nvSpPr>
-        <p:spPr>
-          <a:xfrm>
-            <a:off x="5760720" y="1371600"/>
-            <a:ext cx="1828800" cy="731520"/>
-          </a:xfrm>
-          <a:prstGeom prst="roundRect">
-            <a:avLst/>
-          </a:prstGeom>
-          <a:solidFill>
-            <a:srgbClr val="7C3A9E"/>
-          </a:solidFill>
-          <a:ln w="12700">
-            <a:solidFill>
-              <a:srgbClr val="7C3A9E"/>
-            </a:solidFill>
-          </a:ln>
-        </p:spPr>
-        <p:style>
-          <a:lnRef idx="1">
-            <a:schemeClr val="accent1"/>
-          </a:lnRef>
-          <a:fillRef idx="3">
-            <a:schemeClr val="accent1"/>
-          </a:fillRef>
-          <a:effectRef idx="2">
-            <a:schemeClr val="accent1"/>
-          </a:effectRef>
-          <a:fontRef idx="minor">
-            <a:schemeClr val="lt1"/>
-          </a:fontRef>
-        </p:style>
-        <p:txBody>
-          <a:bodyPr rtlCol="0" anchor="ctr" wrap="square"/>
-          <a:lstStyle/>
-          <a:p>
-            <a:pPr algn="ctr"/>
-            <a:r>
-              <a:rPr sz="1400" b="1">
-                <a:solidFill>
-                  <a:srgbClr val="FFFFFF"/>
-                </a:solidFill>
-              </a:rPr>
-              <a:t>Method</a:t>
-            </a:r>
-          </a:p>
-        </p:txBody>
-      </p:sp>
-      <p:sp>
-        <p:nvSpPr>
-          <p:cNvPr id="7" name="Rounded Rectangle 6"/>
-          <p:cNvSpPr/>
-          <p:nvPr/>
-        </p:nvSpPr>
-        <p:spPr>
-          <a:xfrm>
-            <a:off x="7955280" y="1371600"/>
-            <a:ext cx="1828800" cy="731520"/>
-          </a:xfrm>
-          <a:prstGeom prst="roundRect">
-            <a:avLst/>
-          </a:prstGeom>
-          <a:solidFill>
-            <a:srgbClr val="7C3A9E"/>
-          </a:solidFill>
-          <a:ln w="12700">
-            <a:solidFill>
-              <a:srgbClr val="7C3A9E"/>
-            </a:solidFill>
-          </a:ln>
-        </p:spPr>
-        <p:style>
-          <a:lnRef idx="1">
-            <a:schemeClr val="accent1"/>
-          </a:lnRef>
-          <a:fillRef idx="3">
-            <a:schemeClr val="accent1"/>
-          </a:fillRef>
-          <a:effectRef idx="2">
-            <a:schemeClr val="accent1"/>
-          </a:effectRef>
-          <a:fontRef idx="minor">
-            <a:schemeClr val="lt1"/>
-          </a:fontRef>
-        </p:style>
-        <p:txBody>
-          <a:bodyPr rtlCol="0" anchor="ctr" wrap="square"/>
-          <a:lstStyle/>
-          <a:p>
-            <a:pPr algn="ctr"/>
-            <a:r>
-              <a:rPr sz="1400" b="1">
-                <a:solidFill>
-                  <a:srgbClr val="FFFFFF"/>
-                </a:solidFill>
-              </a:rPr>
-              <a:t>Findings</a:t>
-            </a:r>
-          </a:p>
-        </p:txBody>
-      </p:sp>
-      <p:sp>
-        <p:nvSpPr>
-          <p:cNvPr id="8" name="Rounded Rectangle 7"/>
-          <p:cNvSpPr/>
-          <p:nvPr/>
-        </p:nvSpPr>
-        <p:spPr>
-          <a:xfrm>
-            <a:off x="10149840" y="1371600"/>
-            <a:ext cx="1828800" cy="731520"/>
-          </a:xfrm>
-          <a:prstGeom prst="roundRect">
-            <a:avLst/>
-          </a:prstGeom>
-          <a:solidFill>
-            <a:srgbClr val="7C3A9E"/>
-          </a:solidFill>
-          <a:ln w="12700">
-            <a:solidFill>
-              <a:srgbClr val="7C3A9E"/>
-            </a:solidFill>
-          </a:ln>
-        </p:spPr>
-        <p:style>
-          <a:lnRef idx="1">
-            <a:schemeClr val="accent1"/>
-          </a:lnRef>
-          <a:fillRef idx="3">
-            <a:schemeClr val="accent1"/>
-          </a:fillRef>
-          <a:effectRef idx="2">
-            <a:schemeClr val="accent1"/>
-          </a:effectRef>
-          <a:fontRef idx="minor">
-            <a:schemeClr val="lt1"/>
-          </a:fontRef>
-        </p:style>
-        <p:txBody>
-          <a:bodyPr rtlCol="0" anchor="ctr" wrap="square"/>
-          <a:lstStyle/>
-          <a:p>
-            <a:pPr algn="ctr"/>
-            <a:r>
-              <a:rPr sz="1400" b="1">
-                <a:solidFill>
-                  <a:srgbClr val="FFFFFF"/>
-                </a:solidFill>
-              </a:rPr>
-              <a:t>Implication</a:t>
-            </a:r>
-          </a:p>
-        </p:txBody>
-      </p:sp>
-      <p:cxnSp>
-        <p:nvCxnSpPr>
-          <p:cNvPr id="9" name="Connector 8"/>
-          <p:cNvCxnSpPr/>
-          <p:nvPr/>
-        </p:nvCxnSpPr>
-        <p:spPr>
-          <a:xfrm>
-            <a:off x="3200400" y="1737360"/>
-            <a:ext cx="365760" cy="0"/>
-          </a:xfrm>
-          <a:prstGeom prst="line">
-            <a:avLst/>
-          </a:prstGeom>
-          <a:ln w="27432">
-            <a:solidFill>
-              <a:srgbClr val="7C3A9E"/>
-            </a:solidFill>
-            <a:tailEnd type="triangle" w="med" len="med"/>
-          </a:ln>
-        </p:spPr>
-        <p:style>
-          <a:lnRef idx="2">
-            <a:schemeClr val="accent1"/>
-          </a:lnRef>
-          <a:fillRef idx="0">
-            <a:schemeClr val="accent1"/>
-          </a:fillRef>
-          <a:effectRef idx="1">
-            <a:schemeClr val="accent1"/>
-          </a:effectRef>
-          <a:fontRef idx="minor">
-            <a:schemeClr val="tx1"/>
-          </a:fontRef>
-        </p:style>
-      </p:cxnSp>
-      <p:cxnSp>
-        <p:nvCxnSpPr>
-          <p:cNvPr id="10" name="Connector 9"/>
-          <p:cNvCxnSpPr/>
-          <p:nvPr/>
-        </p:nvCxnSpPr>
-        <p:spPr>
-          <a:xfrm>
-            <a:off x="5394960" y="1737360"/>
-            <a:ext cx="365760" cy="0"/>
-          </a:xfrm>
-          <a:prstGeom prst="line">
-            <a:avLst/>
-          </a:prstGeom>
-          <a:ln w="27432">
-            <a:solidFill>
-              <a:srgbClr val="7C3A9E"/>
-            </a:solidFill>
-            <a:tailEnd type="triangle" w="med" len="med"/>
-          </a:ln>
-        </p:spPr>
-        <p:style>
-          <a:lnRef idx="2">
-            <a:schemeClr val="accent1"/>
-          </a:lnRef>
-          <a:fillRef idx="0">
-            <a:schemeClr val="accent1"/>
-          </a:fillRef>
-          <a:effectRef idx="1">
-            <a:schemeClr val="accent1"/>
-          </a:effectRef>
-          <a:fontRef idx="minor">
-            <a:schemeClr val="tx1"/>
-          </a:fontRef>
-        </p:style>
-      </p:cxnSp>
-      <p:cxnSp>
-        <p:nvCxnSpPr>
-          <p:cNvPr id="11" name="Connector 10"/>
-          <p:cNvCxnSpPr/>
-          <p:nvPr/>
-        </p:nvCxnSpPr>
-        <p:spPr>
-          <a:xfrm>
-            <a:off x="7589520" y="1737360"/>
-            <a:ext cx="365760" cy="0"/>
-          </a:xfrm>
-          <a:prstGeom prst="line">
-            <a:avLst/>
-          </a:prstGeom>
-          <a:ln w="27432">
-            <a:solidFill>
-              <a:srgbClr val="7C3A9E"/>
-            </a:solidFill>
-            <a:tailEnd type="triangle" w="med" len="med"/>
-          </a:ln>
-        </p:spPr>
-        <p:style>
-          <a:lnRef idx="2">
-            <a:schemeClr val="accent1"/>
-          </a:lnRef>
-          <a:fillRef idx="0">
-            <a:schemeClr val="accent1"/>
-          </a:fillRef>
-          <a:effectRef idx="1">
-            <a:schemeClr val="accent1"/>
-          </a:effectRef>
-          <a:fontRef idx="minor">
-            <a:schemeClr val="tx1"/>
-          </a:fontRef>
-        </p:style>
-      </p:cxnSp>
-      <p:cxnSp>
-        <p:nvCxnSpPr>
-          <p:cNvPr id="12" name="Connector 11"/>
-          <p:cNvCxnSpPr/>
-          <p:nvPr/>
-        </p:nvCxnSpPr>
-        <p:spPr>
-          <a:xfrm>
-            <a:off x="9784080" y="1737360"/>
-            <a:ext cx="365760" cy="0"/>
-          </a:xfrm>
-          <a:prstGeom prst="line">
-            <a:avLst/>
-          </a:prstGeom>
-          <a:ln w="27432">
-            <a:solidFill>
-              <a:srgbClr val="7C3A9E"/>
-            </a:solidFill>
-            <a:tailEnd type="triangle" w="med" len="med"/>
-          </a:ln>
-        </p:spPr>
-        <p:style>
-          <a:lnRef idx="2">
-            <a:schemeClr val="accent1"/>
-          </a:lnRef>
-          <a:fillRef idx="0">
-            <a:schemeClr val="accent1"/>
-          </a:fillRef>
-          <a:effectRef idx="1">
-            <a:schemeClr val="accent1"/>
-          </a:effectRef>
-          <a:fontRef idx="minor">
-            <a:schemeClr val="tx1"/>
-          </a:fontRef>
-        </p:style>
-      </p:cxnSp>
-      <p:sp>
-        <p:nvSpPr>
-          <p:cNvPr id="13" name="TextBox 12"/>
+          </a:p>
+        </p:txBody>
+      </p:sp>
+      <p:sp>
+        <p:nvSpPr>
+          <p:cNvPr id="9" name="TextBox 8"/>
           <p:cNvSpPr txBox="1"/>
           <p:nvPr/>
         </p:nvSpPr>
         <p:spPr>
           <a:xfrm>
-            <a:off x="1371600" y="2468880"/>
-            <a:ext cx="1828800" cy="914400"/>
+            <a:off x="1276320" y="2560320"/>
+            <a:ext cx="822960" cy="731520"/>
           </a:xfrm>
           <a:prstGeom prst="rect">
             <a:avLst/>
@@ -6534,35 +6295,26 @@
           <a:p>
             <a:pPr algn="ctr"/>
             <a:r>
-              <a:rPr sz="1200" b="1">
-                <a:solidFill>
-                  <a:srgbClr val="666666"/>
+              <a:rPr b="1" sz="3200">
+                <a:solidFill>
+                  <a:srgbClr val="000000"/>
                 </a:solidFill>
               </a:rPr>
-              <a:t>Background of</a:t>
-            </a:r>
-            <a:br/>
-            <a:r>
-              <a:rPr sz="1200" b="1">
-                <a:solidFill>
-                  <a:srgbClr val="666666"/>
-                </a:solidFill>
-              </a:rPr>
-              <a:t>the research</a:t>
-            </a:r>
-          </a:p>
-        </p:txBody>
-      </p:sp>
-      <p:sp>
-        <p:nvSpPr>
-          <p:cNvPr id="14" name="TextBox 13"/>
+              <a:t>🔍</a:t>
+            </a:r>
+          </a:p>
+        </p:txBody>
+      </p:sp>
+      <p:sp>
+        <p:nvSpPr>
+          <p:cNvPr id="10" name="TextBox 9"/>
           <p:cNvSpPr txBox="1"/>
           <p:nvPr/>
         </p:nvSpPr>
         <p:spPr>
           <a:xfrm>
-            <a:off x="3566160" y="2468880"/>
-            <a:ext cx="1828800" cy="914400"/>
+            <a:off x="2286000" y="2560320"/>
+            <a:ext cx="7315200" cy="457200"/>
           </a:xfrm>
           <a:prstGeom prst="rect">
             <a:avLst/>
@@ -6575,37 +6327,28 @@
           </a:bodyPr>
           <a:lstStyle/>
           <a:p>
-            <a:pPr algn="ctr"/>
-            <a:r>
-              <a:rPr sz="1200" b="1">
-                <a:solidFill>
-                  <a:srgbClr val="666666"/>
+            <a:pPr algn="l"/>
+            <a:r>
+              <a:rPr b="1" sz="1800">
+                <a:solidFill>
+                  <a:srgbClr val="000000"/>
                 </a:solidFill>
               </a:rPr>
-              <a:t>What they</a:t>
-            </a:r>
-            <a:br/>
-            <a:r>
-              <a:rPr sz="1200" b="1">
-                <a:solidFill>
-                  <a:srgbClr val="666666"/>
-                </a:solidFill>
-              </a:rPr>
-              <a:t>wanted to do</a:t>
-            </a:r>
-          </a:p>
-        </p:txBody>
-      </p:sp>
-      <p:sp>
-        <p:nvSpPr>
-          <p:cNvPr id="15" name="TextBox 14"/>
+              <a:t>Practice identifying</a:t>
+            </a:r>
+          </a:p>
+        </p:txBody>
+      </p:sp>
+      <p:sp>
+        <p:nvSpPr>
+          <p:cNvPr id="11" name="TextBox 10"/>
           <p:cNvSpPr txBox="1"/>
           <p:nvPr/>
         </p:nvSpPr>
         <p:spPr>
           <a:xfrm>
-            <a:off x="5760720" y="2468880"/>
-            <a:ext cx="1828800" cy="914400"/>
+            <a:off x="2286000" y="2999232"/>
+            <a:ext cx="7315200" cy="365760"/>
           </a:xfrm>
           <a:prstGeom prst="rect">
             <a:avLst/>
@@ -6618,328 +6361,28 @@
           </a:bodyPr>
           <a:lstStyle/>
           <a:p>
-            <a:pPr algn="ctr"/>
-            <a:r>
-              <a:rPr sz="1200" b="1">
+            <a:pPr algn="l"/>
+            <a:r>
+              <a:rPr b="1" sz="1400">
                 <a:solidFill>
                   <a:srgbClr val="666666"/>
                 </a:solidFill>
               </a:rPr>
-              <a:t>How they</a:t>
-            </a:r>
-            <a:br/>
-            <a:r>
-              <a:rPr sz="1200" b="1">
-                <a:solidFill>
-                  <a:srgbClr val="666666"/>
-                </a:solidFill>
-              </a:rPr>
-              <a:t>did it</a:t>
-            </a:r>
-          </a:p>
-        </p:txBody>
-      </p:sp>
-      <p:sp>
-        <p:nvSpPr>
-          <p:cNvPr id="16" name="TextBox 15"/>
-          <p:cNvSpPr txBox="1"/>
-          <p:nvPr/>
-        </p:nvSpPr>
-        <p:spPr>
-          <a:xfrm>
-            <a:off x="7955280" y="2468880"/>
-            <a:ext cx="1828800" cy="914400"/>
-          </a:xfrm>
-          <a:prstGeom prst="rect">
-            <a:avLst/>
-          </a:prstGeom>
-          <a:noFill/>
-        </p:spPr>
-        <p:txBody>
-          <a:bodyPr wrap="square">
-            <a:spAutoFit/>
-          </a:bodyPr>
-          <a:lstStyle/>
-          <a:p>
-            <a:pPr algn="ctr"/>
-            <a:r>
-              <a:rPr sz="1200" b="1">
-                <a:solidFill>
-                  <a:srgbClr val="666666"/>
-                </a:solidFill>
-              </a:rPr>
-              <a:t>What they</a:t>
-            </a:r>
-            <a:br/>
-            <a:r>
-              <a:rPr sz="1200" b="1">
-                <a:solidFill>
-                  <a:srgbClr val="666666"/>
-                </a:solidFill>
-              </a:rPr>
-              <a:t>found</a:t>
-            </a:r>
-          </a:p>
-        </p:txBody>
-      </p:sp>
-      <p:sp>
-        <p:nvSpPr>
-          <p:cNvPr id="17" name="TextBox 16"/>
-          <p:cNvSpPr txBox="1"/>
-          <p:nvPr/>
-        </p:nvSpPr>
-        <p:spPr>
-          <a:xfrm>
-            <a:off x="10149840" y="2468880"/>
-            <a:ext cx="1828800" cy="914400"/>
-          </a:xfrm>
-          <a:prstGeom prst="rect">
-            <a:avLst/>
-          </a:prstGeom>
-          <a:noFill/>
-        </p:spPr>
-        <p:txBody>
-          <a:bodyPr wrap="square">
-            <a:spAutoFit/>
-          </a:bodyPr>
-          <a:lstStyle/>
-          <a:p>
-            <a:pPr algn="ctr"/>
-            <a:r>
-              <a:rPr sz="1200" b="1">
-                <a:solidFill>
-                  <a:srgbClr val="666666"/>
-                </a:solidFill>
-              </a:rPr>
-              <a:t>Why it</a:t>
-            </a:r>
-            <a:br/>
-            <a:r>
-              <a:rPr sz="1200" b="1">
-                <a:solidFill>
-                  <a:srgbClr val="666666"/>
-                </a:solidFill>
-              </a:rPr>
-              <a:t>matters</a:t>
-            </a:r>
-          </a:p>
-        </p:txBody>
-      </p:sp>
-      <p:sp>
-        <p:nvSpPr>
-          <p:cNvPr id="18" name="TextBox 17"/>
-          <p:cNvSpPr txBox="1"/>
-          <p:nvPr/>
-        </p:nvSpPr>
-        <p:spPr>
-          <a:xfrm>
-            <a:off x="1371600" y="3566160"/>
-            <a:ext cx="9418320" cy="365760"/>
-          </a:xfrm>
-          <a:prstGeom prst="rect">
-            <a:avLst/>
-          </a:prstGeom>
-          <a:noFill/>
-        </p:spPr>
-        <p:txBody>
-          <a:bodyPr wrap="square">
-            <a:spAutoFit/>
-          </a:bodyPr>
-          <a:lstStyle/>
-          <a:p>
-            <a:pPr algn="l"/>
-            <a:r>
-              <a:rPr sz="1600" b="1">
-                <a:solidFill>
-                  <a:srgbClr val="000000"/>
-                </a:solidFill>
-              </a:rPr>
-              <a:t>Each sentence = one function → decode systematically</a:t>
-            </a:r>
-          </a:p>
-        </p:txBody>
-      </p:sp>
-      <p:sp>
-        <p:nvSpPr>
-          <p:cNvPr id="19" name="TextBox 18"/>
-          <p:cNvSpPr txBox="1"/>
-          <p:nvPr/>
-        </p:nvSpPr>
-        <p:spPr>
-          <a:xfrm>
-            <a:off x="1371600" y="4206240"/>
-            <a:ext cx="9326880" cy="731520"/>
-          </a:xfrm>
-          <a:prstGeom prst="rect">
-            <a:avLst/>
-          </a:prstGeom>
-          <a:noFill/>
-        </p:spPr>
-        <p:txBody>
-          <a:bodyPr wrap="square">
-            <a:spAutoFit/>
-          </a:bodyPr>
-          <a:lstStyle/>
-          <a:p>
-            <a:pPr algn="l"/>
-            <a:r>
-              <a:rPr sz="1200" b="1">
-                <a:solidFill>
-                  <a:srgbClr val="666666"/>
-                </a:solidFill>
-              </a:rPr>
-              <a:t>e.g. "This research examined... [Aim]  Between Oct–Nov... [Method]  The findings indicated... [Findings]  Collectively... [Implication]"</a:t>
-            </a:r>
-          </a:p>
-        </p:txBody>
-      </p:sp>
-      <p:sp>
-        <p:nvSpPr>
-          <p:cNvPr id="20" name="Rectangle 19"/>
+              <a:t>Sentence-level function labels</a:t>
+            </a:r>
+          </a:p>
+        </p:txBody>
+      </p:sp>
+      <p:sp>
+        <p:nvSpPr>
+          <p:cNvPr id="12" name="Rectangle 11"/>
           <p:cNvSpPr/>
           <p:nvPr/>
         </p:nvSpPr>
         <p:spPr>
           <a:xfrm>
-            <a:off x="731520" y="5486400"/>
-            <a:ext cx="10515600" cy="640080"/>
-          </a:xfrm>
-          <a:prstGeom prst="rect">
-            <a:avLst/>
-          </a:prstGeom>
-          <a:solidFill>
-            <a:srgbClr val="F5F0FA"/>
-          </a:solidFill>
-          <a:ln>
-            <a:noFill/>
-          </a:ln>
-        </p:spPr>
-        <p:style>
-          <a:lnRef idx="1">
-            <a:schemeClr val="accent1"/>
-          </a:lnRef>
-          <a:fillRef idx="3">
-            <a:schemeClr val="accent1"/>
-          </a:fillRef>
-          <a:effectRef idx="2">
-            <a:schemeClr val="accent1"/>
-          </a:effectRef>
-          <a:fontRef idx="minor">
-            <a:schemeClr val="lt1"/>
-          </a:fontRef>
-        </p:style>
-        <p:txBody>
-          <a:bodyPr rtlCol="0" anchor="ctr"/>
-          <a:lstStyle/>
-          <a:p>
-            <a:pPr algn="ctr"/>
-          </a:p>
-        </p:txBody>
-      </p:sp>
-      <p:sp>
-        <p:nvSpPr>
-          <p:cNvPr id="21" name="TextBox 20"/>
-          <p:cNvSpPr txBox="1"/>
-          <p:nvPr/>
-        </p:nvSpPr>
-        <p:spPr>
-          <a:xfrm>
-            <a:off x="1097280" y="5532120"/>
-            <a:ext cx="10058400" cy="548640"/>
-          </a:xfrm>
-          <a:prstGeom prst="rect">
-            <a:avLst/>
-          </a:prstGeom>
-          <a:noFill/>
-        </p:spPr>
-        <p:txBody>
-          <a:bodyPr wrap="square">
-            <a:spAutoFit/>
-          </a:bodyPr>
-          <a:lstStyle/>
-          <a:p>
-            <a:pPr algn="l"/>
-            <a:r>
-              <a:rPr sz="1800" b="1">
-                <a:solidFill>
-                  <a:srgbClr val="FF0000"/>
-                </a:solidFill>
-              </a:rPr>
-              <a:t>Decode the abstract sentence by sentence</a:t>
-            </a:r>
-          </a:p>
-        </p:txBody>
-      </p:sp>
-      <p:sp>
-        <p:nvSpPr>
-          <p:cNvPr id="22" name="TextBox 21"/>
-          <p:cNvSpPr txBox="1"/>
-          <p:nvPr/>
-        </p:nvSpPr>
-        <p:spPr>
-          <a:xfrm>
-            <a:off x="11155680" y="6400800"/>
-            <a:ext cx="914400" cy="365760"/>
-          </a:xfrm>
-          <a:prstGeom prst="rect">
-            <a:avLst/>
-          </a:prstGeom>
-          <a:noFill/>
-        </p:spPr>
-        <p:txBody>
-          <a:bodyPr wrap="square">
-            <a:spAutoFit/>
-          </a:bodyPr>
-          <a:lstStyle/>
-          <a:p>
-            <a:pPr algn="r"/>
-            <a:r>
-              <a:rPr b="1">
-                <a:solidFill>
-                  <a:srgbClr val="666666"/>
-                </a:solidFill>
-              </a:rPr>
-              <a:t>6</a:t>
-            </a:r>
-          </a:p>
-        </p:txBody>
-      </p:sp>
-    </p:spTree>
-  </p:cSld>
-  <p:clrMapOvr>
-    <a:masterClrMapping/>
-  </p:clrMapOvr>
-</p:sld>
-</file>
-
-<file path=ppt/slides/slide7.xml><?xml version="1.0" encoding="utf-8"?>
-<p:sld xmlns:a="http://schemas.openxmlformats.org/drawingml/2006/main" xmlns:p="http://schemas.openxmlformats.org/presentationml/2006/main" xmlns:r="http://schemas.openxmlformats.org/officeDocument/2006/relationships">
-  <p:cSld>
-    <p:bg>
-      <p:bgPr>
-        <a:solidFill>
-          <a:srgbClr val="FFFFFF"/>
-        </a:solidFill>
-        <a:effectLst/>
-      </p:bgPr>
-    </p:bg>
-    <p:spTree>
-      <p:nvGrpSpPr>
-        <p:cNvPr id="1" name=""/>
-        <p:cNvGrpSpPr/>
-        <p:nvPr/>
-      </p:nvGrpSpPr>
-      <p:grpSpPr/>
-      <p:sp>
-        <p:nvSpPr>
-          <p:cNvPr id="2" name="Rectangle 1"/>
-          <p:cNvSpPr/>
-          <p:nvPr/>
-        </p:nvSpPr>
-        <p:spPr>
-          <a:xfrm>
-            <a:off x="0" y="0"/>
-            <a:ext cx="109728" cy="6858000"/>
+            <a:off x="914400" y="3566160"/>
+            <a:ext cx="137160" cy="914400"/>
           </a:xfrm>
           <a:prstGeom prst="rect">
             <a:avLst/>
@@ -6975,14 +6418,14 @@
       </p:sp>
       <p:sp>
         <p:nvSpPr>
-          <p:cNvPr id="3" name="TextBox 2"/>
+          <p:cNvPr id="13" name="TextBox 12"/>
           <p:cNvSpPr txBox="1"/>
           <p:nvPr/>
         </p:nvSpPr>
         <p:spPr>
           <a:xfrm>
-            <a:off x="914400" y="548640"/>
-            <a:ext cx="10058400" cy="645160"/>
+            <a:off x="1276320" y="3657600"/>
+            <a:ext cx="822960" cy="731520"/>
           </a:xfrm>
           <a:prstGeom prst="rect">
             <a:avLst/>
@@ -6995,32 +6438,106 @@
           </a:bodyPr>
           <a:lstStyle/>
           <a:p>
+            <a:pPr algn="ctr"/>
+            <a:r>
+              <a:rPr b="1" sz="3200">
+                <a:solidFill>
+                  <a:srgbClr val="000000"/>
+                </a:solidFill>
+              </a:rPr>
+              <a:t>📝</a:t>
+            </a:r>
+          </a:p>
+        </p:txBody>
+      </p:sp>
+      <p:sp>
+        <p:nvSpPr>
+          <p:cNvPr id="14" name="TextBox 13"/>
+          <p:cNvSpPr txBox="1"/>
+          <p:nvPr/>
+        </p:nvSpPr>
+        <p:spPr>
+          <a:xfrm>
+            <a:off x="2286000" y="3657600"/>
+            <a:ext cx="7315200" cy="457200"/>
+          </a:xfrm>
+          <a:prstGeom prst="rect">
+            <a:avLst/>
+          </a:prstGeom>
+          <a:noFill/>
+        </p:spPr>
+        <p:txBody>
+          <a:bodyPr wrap="square">
+            <a:spAutoFit/>
+          </a:bodyPr>
+          <a:lstStyle/>
+          <a:p>
             <a:pPr algn="l"/>
             <a:r>
-              <a:rPr b="1">
+              <a:rPr b="1" sz="1800">
                 <a:solidFill>
                   <a:srgbClr val="000000"/>
                 </a:solidFill>
               </a:rPr>
-              <a:t>Prepare for Reading Assessment</a:t>
-            </a:r>
-          </a:p>
-        </p:txBody>
-      </p:sp>
-      <p:sp>
-        <p:nvSpPr>
-          <p:cNvPr id="4" name="Oval 3"/>
+              <a:t>Build vocabulary</a:t>
+            </a:r>
+          </a:p>
+        </p:txBody>
+      </p:sp>
+      <p:sp>
+        <p:nvSpPr>
+          <p:cNvPr id="15" name="TextBox 14"/>
+          <p:cNvSpPr txBox="1"/>
+          <p:nvPr/>
+        </p:nvSpPr>
+        <p:spPr>
+          <a:xfrm>
+            <a:off x="2286000" y="4096512"/>
+            <a:ext cx="7315200" cy="365760"/>
+          </a:xfrm>
+          <a:prstGeom prst="rect">
+            <a:avLst/>
+          </a:prstGeom>
+          <a:noFill/>
+        </p:spPr>
+        <p:txBody>
+          <a:bodyPr wrap="square">
+            <a:spAutoFit/>
+          </a:bodyPr>
+          <a:lstStyle/>
+          <a:p>
+            <a:pPr algn="l"/>
+            <a:r>
+              <a:rPr b="1" sz="1400">
+                <a:solidFill>
+                  <a:srgbClr val="666666"/>
+                </a:solidFill>
+              </a:rPr>
+              <a:t>Reporting verbs + connectors</a:t>
+            </a:r>
+          </a:p>
+        </p:txBody>
+      </p:sp>
+      <p:sp>
+        <p:nvSpPr>
+          <p:cNvPr id="16" name="Rectangle 15"/>
           <p:cNvSpPr/>
           <p:nvPr/>
         </p:nvSpPr>
         <p:spPr>
           <a:xfrm>
-            <a:off x="1912620" y="1554480"/>
-            <a:ext cx="685800" cy="685800"/>
-          </a:xfrm>
-          <a:prstGeom prst="ellipse">
-            <a:avLst/>
-          </a:prstGeom>
+            <a:off x="914400" y="4663440"/>
+            <a:ext cx="137160" cy="914400"/>
+          </a:xfrm>
+          <a:prstGeom prst="rect">
+            <a:avLst/>
+          </a:prstGeom>
+          <a:solidFill>
+            <a:srgbClr val="2E864B"/>
+          </a:solidFill>
+          <a:ln>
+            <a:noFill/>
+          </a:ln>
         </p:spPr>
         <p:style>
           <a:lnRef idx="1">
@@ -7046,65 +6563,14 @@
       </p:sp>
       <p:sp>
         <p:nvSpPr>
-          <p:cNvPr id="5" name="Oval 4"/>
-          <p:cNvSpPr/>
-          <p:nvPr/>
-        </p:nvSpPr>
-        <p:spPr>
-          <a:xfrm>
-            <a:off x="1912620" y="1554480"/>
-            <a:ext cx="685800" cy="685800"/>
-          </a:xfrm>
-          <a:prstGeom prst="ellipse">
-            <a:avLst/>
-          </a:prstGeom>
-          <a:solidFill>
-            <a:srgbClr val="7C3A9E"/>
-          </a:solidFill>
-          <a:ln>
-            <a:noFill/>
-          </a:ln>
-        </p:spPr>
-        <p:style>
-          <a:lnRef idx="1">
-            <a:schemeClr val="accent1"/>
-          </a:lnRef>
-          <a:fillRef idx="3">
-            <a:schemeClr val="accent1"/>
-          </a:fillRef>
-          <a:effectRef idx="2">
-            <a:schemeClr val="accent1"/>
-          </a:effectRef>
-          <a:fontRef idx="minor">
-            <a:schemeClr val="lt1"/>
-          </a:fontRef>
-        </p:style>
-        <p:txBody>
-          <a:bodyPr rtlCol="0" anchor="ctr"/>
-          <a:lstStyle/>
-          <a:p>
-            <a:pPr algn="ctr"/>
-            <a:r>
-              <a:rPr sz="2400" b="1">
-                <a:solidFill>
-                  <a:srgbClr val="FFFFFF"/>
-                </a:solidFill>
-              </a:rPr>
-              <a:t>1</a:t>
-            </a:r>
-          </a:p>
-        </p:txBody>
-      </p:sp>
-      <p:sp>
-        <p:nvSpPr>
-          <p:cNvPr id="6" name="TextBox 5"/>
+          <p:cNvPr id="17" name="TextBox 16"/>
           <p:cNvSpPr txBox="1"/>
           <p:nvPr/>
         </p:nvSpPr>
         <p:spPr>
           <a:xfrm>
-            <a:off x="1203960" y="2468880"/>
-            <a:ext cx="2103120" cy="731520"/>
+            <a:off x="1276320" y="4754880"/>
+            <a:ext cx="822960" cy="731520"/>
           </a:xfrm>
           <a:prstGeom prst="rect">
             <a:avLst/>
@@ -7119,35 +6585,26 @@
           <a:p>
             <a:pPr algn="ctr"/>
             <a:r>
-              <a:rPr sz="1400" b="1">
+              <a:rPr b="1" sz="3200">
                 <a:solidFill>
                   <a:srgbClr val="000000"/>
                 </a:solidFill>
               </a:rPr>
-              <a:t>Know</a:t>
-            </a:r>
-            <a:br/>
-            <a:r>
-              <a:rPr sz="1400" b="1">
-                <a:solidFill>
-                  <a:srgbClr val="000000"/>
-                </a:solidFill>
-              </a:rPr>
-              <a:t>Structure</a:t>
-            </a:r>
-          </a:p>
-        </p:txBody>
-      </p:sp>
-      <p:sp>
-        <p:nvSpPr>
-          <p:cNvPr id="7" name="TextBox 6"/>
+              <a:t>✅</a:t>
+            </a:r>
+          </a:p>
+        </p:txBody>
+      </p:sp>
+      <p:sp>
+        <p:nvSpPr>
+          <p:cNvPr id="18" name="TextBox 17"/>
           <p:cNvSpPr txBox="1"/>
           <p:nvPr/>
         </p:nvSpPr>
         <p:spPr>
           <a:xfrm>
-            <a:off x="1203960" y="3108960"/>
-            <a:ext cx="2103120" cy="640080"/>
+            <a:off x="2286000" y="4754880"/>
+            <a:ext cx="7315200" cy="457200"/>
           </a:xfrm>
           <a:prstGeom prst="rect">
             <a:avLst/>
@@ -7160,125 +6617,28 @@
           </a:bodyPr>
           <a:lstStyle/>
           <a:p>
-            <a:pPr algn="ctr"/>
-            <a:r>
-              <a:rPr sz="1200" b="1">
-                <a:solidFill>
-                  <a:srgbClr val="666666"/>
+            <a:pPr algn="l"/>
+            <a:r>
+              <a:rPr b="1" sz="1800">
+                <a:solidFill>
+                  <a:srgbClr val="000000"/>
                 </a:solidFill>
               </a:rPr>
-              <a:t>7 elements</a:t>
-            </a:r>
-            <a:br/>
-            <a:r>
-              <a:rPr sz="1200" b="1">
-                <a:solidFill>
-                  <a:srgbClr val="666666"/>
-                </a:solidFill>
-              </a:rPr>
-              <a:t>+ functions</a:t>
-            </a:r>
-          </a:p>
-        </p:txBody>
-      </p:sp>
-      <p:sp>
-        <p:nvSpPr>
-          <p:cNvPr id="8" name="Oval 7"/>
-          <p:cNvSpPr/>
-          <p:nvPr/>
-        </p:nvSpPr>
-        <p:spPr>
-          <a:xfrm>
-            <a:off x="4472940" y="1554480"/>
-            <a:ext cx="685800" cy="685800"/>
-          </a:xfrm>
-          <a:prstGeom prst="ellipse">
-            <a:avLst/>
-          </a:prstGeom>
-        </p:spPr>
-        <p:style>
-          <a:lnRef idx="1">
-            <a:schemeClr val="accent1"/>
-          </a:lnRef>
-          <a:fillRef idx="3">
-            <a:schemeClr val="accent1"/>
-          </a:fillRef>
-          <a:effectRef idx="2">
-            <a:schemeClr val="accent1"/>
-          </a:effectRef>
-          <a:fontRef idx="minor">
-            <a:schemeClr val="lt1"/>
-          </a:fontRef>
-        </p:style>
-        <p:txBody>
-          <a:bodyPr rtlCol="0" anchor="ctr"/>
-          <a:lstStyle/>
-          <a:p>
-            <a:pPr algn="ctr"/>
-          </a:p>
-        </p:txBody>
-      </p:sp>
-      <p:sp>
-        <p:nvSpPr>
-          <p:cNvPr id="9" name="Oval 8"/>
-          <p:cNvSpPr/>
-          <p:nvPr/>
-        </p:nvSpPr>
-        <p:spPr>
-          <a:xfrm>
-            <a:off x="4472940" y="1554480"/>
-            <a:ext cx="685800" cy="685800"/>
-          </a:xfrm>
-          <a:prstGeom prst="ellipse">
-            <a:avLst/>
-          </a:prstGeom>
-          <a:solidFill>
-            <a:srgbClr val="7C3A9E"/>
-          </a:solidFill>
-          <a:ln>
-            <a:noFill/>
-          </a:ln>
-        </p:spPr>
-        <p:style>
-          <a:lnRef idx="1">
-            <a:schemeClr val="accent1"/>
-          </a:lnRef>
-          <a:fillRef idx="3">
-            <a:schemeClr val="accent1"/>
-          </a:fillRef>
-          <a:effectRef idx="2">
-            <a:schemeClr val="accent1"/>
-          </a:effectRef>
-          <a:fontRef idx="minor">
-            <a:schemeClr val="lt1"/>
-          </a:fontRef>
-        </p:style>
-        <p:txBody>
-          <a:bodyPr rtlCol="0" anchor="ctr"/>
-          <a:lstStyle/>
-          <a:p>
-            <a:pPr algn="ctr"/>
-            <a:r>
-              <a:rPr sz="2400" b="1">
-                <a:solidFill>
-                  <a:srgbClr val="FFFFFF"/>
-                </a:solidFill>
-              </a:rPr>
-              <a:t>2</a:t>
-            </a:r>
-          </a:p>
-        </p:txBody>
-      </p:sp>
-      <p:sp>
-        <p:nvSpPr>
-          <p:cNvPr id="10" name="TextBox 9"/>
+              <a:t>Complete all materials</a:t>
+            </a:r>
+          </a:p>
+        </p:txBody>
+      </p:sp>
+      <p:sp>
+        <p:nvSpPr>
+          <p:cNvPr id="19" name="TextBox 18"/>
           <p:cNvSpPr txBox="1"/>
           <p:nvPr/>
         </p:nvSpPr>
         <p:spPr>
           <a:xfrm>
-            <a:off x="3764280" y="2468880"/>
-            <a:ext cx="2103120" cy="731520"/>
+            <a:off x="2286000" y="5193792"/>
+            <a:ext cx="7315200" cy="365760"/>
           </a:xfrm>
           <a:prstGeom prst="rect">
             <a:avLst/>
@@ -7291,37 +6651,28 @@
           </a:bodyPr>
           <a:lstStyle/>
           <a:p>
-            <a:pPr algn="ctr"/>
-            <a:r>
-              <a:rPr sz="1400" b="1">
-                <a:solidFill>
-                  <a:srgbClr val="000000"/>
+            <a:pPr algn="l"/>
+            <a:r>
+              <a:rPr b="1" sz="1400">
+                <a:solidFill>
+                  <a:srgbClr val="666666"/>
                 </a:solidFill>
               </a:rPr>
-              <a:t>Practice</a:t>
-            </a:r>
-            <a:br/>
-            <a:r>
-              <a:rPr sz="1400" b="1">
-                <a:solidFill>
-                  <a:srgbClr val="000000"/>
-                </a:solidFill>
-              </a:rPr>
-              <a:t>Identify</a:t>
-            </a:r>
-          </a:p>
-        </p:txBody>
-      </p:sp>
-      <p:sp>
-        <p:nvSpPr>
-          <p:cNvPr id="11" name="TextBox 10"/>
+              <a:t>Videos 1 &amp; 2 + activities</a:t>
+            </a:r>
+          </a:p>
+        </p:txBody>
+      </p:sp>
+      <p:sp>
+        <p:nvSpPr>
+          <p:cNvPr id="20" name="TextBox 19"/>
           <p:cNvSpPr txBox="1"/>
           <p:nvPr/>
         </p:nvSpPr>
         <p:spPr>
           <a:xfrm>
-            <a:off x="3764280" y="3108960"/>
-            <a:ext cx="2103120" cy="640080"/>
+            <a:off x="11155680" y="6400800"/>
+            <a:ext cx="914400" cy="365760"/>
           </a:xfrm>
           <a:prstGeom prst="rect">
             <a:avLst/>
@@ -7334,482 +6685,14 @@
           </a:bodyPr>
           <a:lstStyle/>
           <a:p>
-            <a:pPr algn="ctr"/>
-            <a:r>
-              <a:rPr sz="1200" b="1">
+            <a:pPr algn="r"/>
+            <a:r>
+              <a:rPr b="1">
                 <a:solidFill>
                   <a:srgbClr val="666666"/>
                 </a:solidFill>
               </a:rPr>
-              <a:t>Sentence-level</a:t>
-            </a:r>
-            <a:br/>
-            <a:r>
-              <a:rPr sz="1200" b="1">
-                <a:solidFill>
-                  <a:srgbClr val="666666"/>
-                </a:solidFill>
-              </a:rPr>
-              <a:t>function labels</a:t>
-            </a:r>
-          </a:p>
-        </p:txBody>
-      </p:sp>
-      <p:sp>
-        <p:nvSpPr>
-          <p:cNvPr id="12" name="Oval 11"/>
-          <p:cNvSpPr/>
-          <p:nvPr/>
-        </p:nvSpPr>
-        <p:spPr>
-          <a:xfrm>
-            <a:off x="7033260" y="1554480"/>
-            <a:ext cx="685800" cy="685800"/>
-          </a:xfrm>
-          <a:prstGeom prst="ellipse">
-            <a:avLst/>
-          </a:prstGeom>
-        </p:spPr>
-        <p:style>
-          <a:lnRef idx="1">
-            <a:schemeClr val="accent1"/>
-          </a:lnRef>
-          <a:fillRef idx="3">
-            <a:schemeClr val="accent1"/>
-          </a:fillRef>
-          <a:effectRef idx="2">
-            <a:schemeClr val="accent1"/>
-          </a:effectRef>
-          <a:fontRef idx="minor">
-            <a:schemeClr val="lt1"/>
-          </a:fontRef>
-        </p:style>
-        <p:txBody>
-          <a:bodyPr rtlCol="0" anchor="ctr"/>
-          <a:lstStyle/>
-          <a:p>
-            <a:pPr algn="ctr"/>
-          </a:p>
-        </p:txBody>
-      </p:sp>
-      <p:sp>
-        <p:nvSpPr>
-          <p:cNvPr id="13" name="Oval 12"/>
-          <p:cNvSpPr/>
-          <p:nvPr/>
-        </p:nvSpPr>
-        <p:spPr>
-          <a:xfrm>
-            <a:off x="7033260" y="1554480"/>
-            <a:ext cx="685800" cy="685800"/>
-          </a:xfrm>
-          <a:prstGeom prst="ellipse">
-            <a:avLst/>
-          </a:prstGeom>
-          <a:solidFill>
-            <a:srgbClr val="7C3A9E"/>
-          </a:solidFill>
-          <a:ln>
-            <a:noFill/>
-          </a:ln>
-        </p:spPr>
-        <p:style>
-          <a:lnRef idx="1">
-            <a:schemeClr val="accent1"/>
-          </a:lnRef>
-          <a:fillRef idx="3">
-            <a:schemeClr val="accent1"/>
-          </a:fillRef>
-          <a:effectRef idx="2">
-            <a:schemeClr val="accent1"/>
-          </a:effectRef>
-          <a:fontRef idx="minor">
-            <a:schemeClr val="lt1"/>
-          </a:fontRef>
-        </p:style>
-        <p:txBody>
-          <a:bodyPr rtlCol="0" anchor="ctr"/>
-          <a:lstStyle/>
-          <a:p>
-            <a:pPr algn="ctr"/>
-            <a:r>
-              <a:rPr sz="2400" b="1">
-                <a:solidFill>
-                  <a:srgbClr val="FFFFFF"/>
-                </a:solidFill>
-              </a:rPr>
-              <a:t>3</a:t>
-            </a:r>
-          </a:p>
-        </p:txBody>
-      </p:sp>
-      <p:sp>
-        <p:nvSpPr>
-          <p:cNvPr id="14" name="TextBox 13"/>
-          <p:cNvSpPr txBox="1"/>
-          <p:nvPr/>
-        </p:nvSpPr>
-        <p:spPr>
-          <a:xfrm>
-            <a:off x="6324600" y="2468880"/>
-            <a:ext cx="2103120" cy="731520"/>
-          </a:xfrm>
-          <a:prstGeom prst="rect">
-            <a:avLst/>
-          </a:prstGeom>
-          <a:noFill/>
-        </p:spPr>
-        <p:txBody>
-          <a:bodyPr wrap="square">
-            <a:spAutoFit/>
-          </a:bodyPr>
-          <a:lstStyle/>
-          <a:p>
-            <a:pPr algn="ctr"/>
-            <a:r>
-              <a:rPr sz="1400" b="1">
-                <a:solidFill>
-                  <a:srgbClr val="000000"/>
-                </a:solidFill>
-              </a:rPr>
-              <a:t>Build</a:t>
-            </a:r>
-            <a:br/>
-            <a:r>
-              <a:rPr sz="1400" b="1">
-                <a:solidFill>
-                  <a:srgbClr val="000000"/>
-                </a:solidFill>
-              </a:rPr>
-              <a:t>Vocabulary</a:t>
-            </a:r>
-          </a:p>
-        </p:txBody>
-      </p:sp>
-      <p:sp>
-        <p:nvSpPr>
-          <p:cNvPr id="15" name="TextBox 14"/>
-          <p:cNvSpPr txBox="1"/>
-          <p:nvPr/>
-        </p:nvSpPr>
-        <p:spPr>
-          <a:xfrm>
-            <a:off x="6324600" y="3108960"/>
-            <a:ext cx="2103120" cy="640080"/>
-          </a:xfrm>
-          <a:prstGeom prst="rect">
-            <a:avLst/>
-          </a:prstGeom>
-          <a:noFill/>
-        </p:spPr>
-        <p:txBody>
-          <a:bodyPr wrap="square">
-            <a:spAutoFit/>
-          </a:bodyPr>
-          <a:lstStyle/>
-          <a:p>
-            <a:pPr algn="ctr"/>
-            <a:r>
-              <a:rPr sz="1200" b="1">
-                <a:solidFill>
-                  <a:srgbClr val="666666"/>
-                </a:solidFill>
-              </a:rPr>
-              <a:t>Reporting verbs</a:t>
-            </a:r>
-            <a:br/>
-            <a:r>
-              <a:rPr sz="1200" b="1">
-                <a:solidFill>
-                  <a:srgbClr val="666666"/>
-                </a:solidFill>
-              </a:rPr>
-              <a:t>+ connectors</a:t>
-            </a:r>
-          </a:p>
-        </p:txBody>
-      </p:sp>
-      <p:sp>
-        <p:nvSpPr>
-          <p:cNvPr id="16" name="Oval 15"/>
-          <p:cNvSpPr/>
-          <p:nvPr/>
-        </p:nvSpPr>
-        <p:spPr>
-          <a:xfrm>
-            <a:off x="9593580" y="1554480"/>
-            <a:ext cx="685800" cy="685800"/>
-          </a:xfrm>
-          <a:prstGeom prst="ellipse">
-            <a:avLst/>
-          </a:prstGeom>
-        </p:spPr>
-        <p:style>
-          <a:lnRef idx="1">
-            <a:schemeClr val="accent1"/>
-          </a:lnRef>
-          <a:fillRef idx="3">
-            <a:schemeClr val="accent1"/>
-          </a:fillRef>
-          <a:effectRef idx="2">
-            <a:schemeClr val="accent1"/>
-          </a:effectRef>
-          <a:fontRef idx="minor">
-            <a:schemeClr val="lt1"/>
-          </a:fontRef>
-        </p:style>
-        <p:txBody>
-          <a:bodyPr rtlCol="0" anchor="ctr"/>
-          <a:lstStyle/>
-          <a:p>
-            <a:pPr algn="ctr"/>
-          </a:p>
-        </p:txBody>
-      </p:sp>
-      <p:sp>
-        <p:nvSpPr>
-          <p:cNvPr id="17" name="Oval 16"/>
-          <p:cNvSpPr/>
-          <p:nvPr/>
-        </p:nvSpPr>
-        <p:spPr>
-          <a:xfrm>
-            <a:off x="9593580" y="1554480"/>
-            <a:ext cx="685800" cy="685800"/>
-          </a:xfrm>
-          <a:prstGeom prst="ellipse">
-            <a:avLst/>
-          </a:prstGeom>
-          <a:solidFill>
-            <a:srgbClr val="7C3A9E"/>
-          </a:solidFill>
-          <a:ln>
-            <a:noFill/>
-          </a:ln>
-        </p:spPr>
-        <p:style>
-          <a:lnRef idx="1">
-            <a:schemeClr val="accent1"/>
-          </a:lnRef>
-          <a:fillRef idx="3">
-            <a:schemeClr val="accent1"/>
-          </a:fillRef>
-          <a:effectRef idx="2">
-            <a:schemeClr val="accent1"/>
-          </a:effectRef>
-          <a:fontRef idx="minor">
-            <a:schemeClr val="lt1"/>
-          </a:fontRef>
-        </p:style>
-        <p:txBody>
-          <a:bodyPr rtlCol="0" anchor="ctr"/>
-          <a:lstStyle/>
-          <a:p>
-            <a:pPr algn="ctr"/>
-            <a:r>
-              <a:rPr sz="2400" b="1">
-                <a:solidFill>
-                  <a:srgbClr val="FFFFFF"/>
-                </a:solidFill>
-              </a:rPr>
-              <a:t>4</a:t>
-            </a:r>
-          </a:p>
-        </p:txBody>
-      </p:sp>
-      <p:sp>
-        <p:nvSpPr>
-          <p:cNvPr id="18" name="TextBox 17"/>
-          <p:cNvSpPr txBox="1"/>
-          <p:nvPr/>
-        </p:nvSpPr>
-        <p:spPr>
-          <a:xfrm>
-            <a:off x="8884920" y="2468880"/>
-            <a:ext cx="2103120" cy="731520"/>
-          </a:xfrm>
-          <a:prstGeom prst="rect">
-            <a:avLst/>
-          </a:prstGeom>
-          <a:noFill/>
-        </p:spPr>
-        <p:txBody>
-          <a:bodyPr wrap="square">
-            <a:spAutoFit/>
-          </a:bodyPr>
-          <a:lstStyle/>
-          <a:p>
-            <a:pPr algn="ctr"/>
-            <a:r>
-              <a:rPr sz="1400" b="1">
-                <a:solidFill>
-                  <a:srgbClr val="000000"/>
-                </a:solidFill>
-              </a:rPr>
-              <a:t>Complete</a:t>
-            </a:r>
-            <a:br/>
-            <a:r>
-              <a:rPr sz="1400" b="1">
-                <a:solidFill>
-                  <a:srgbClr val="000000"/>
-                </a:solidFill>
-              </a:rPr>
-              <a:t>Materials</a:t>
-            </a:r>
-          </a:p>
-        </p:txBody>
-      </p:sp>
-      <p:sp>
-        <p:nvSpPr>
-          <p:cNvPr id="19" name="TextBox 18"/>
-          <p:cNvSpPr txBox="1"/>
-          <p:nvPr/>
-        </p:nvSpPr>
-        <p:spPr>
-          <a:xfrm>
-            <a:off x="8884920" y="3108960"/>
-            <a:ext cx="2103120" cy="640080"/>
-          </a:xfrm>
-          <a:prstGeom prst="rect">
-            <a:avLst/>
-          </a:prstGeom>
-          <a:noFill/>
-        </p:spPr>
-        <p:txBody>
-          <a:bodyPr wrap="square">
-            <a:spAutoFit/>
-          </a:bodyPr>
-          <a:lstStyle/>
-          <a:p>
-            <a:pPr algn="ctr"/>
-            <a:r>
-              <a:rPr sz="1200" b="1">
-                <a:solidFill>
-                  <a:srgbClr val="666666"/>
-                </a:solidFill>
-              </a:rPr>
-              <a:t>Videos 1 &amp; 2</a:t>
-            </a:r>
-            <a:br/>
-            <a:r>
-              <a:rPr sz="1200" b="1">
-                <a:solidFill>
-                  <a:srgbClr val="666666"/>
-                </a:solidFill>
-              </a:rPr>
-              <a:t>+ activities</a:t>
-            </a:r>
-          </a:p>
-        </p:txBody>
-      </p:sp>
-      <p:sp>
-        <p:nvSpPr>
-          <p:cNvPr id="20" name="Rectangle 19"/>
-          <p:cNvSpPr/>
-          <p:nvPr/>
-        </p:nvSpPr>
-        <p:spPr>
-          <a:xfrm>
-            <a:off x="731520" y="5486400"/>
-            <a:ext cx="10515600" cy="640080"/>
-          </a:xfrm>
-          <a:prstGeom prst="rect">
-            <a:avLst/>
-          </a:prstGeom>
-          <a:solidFill>
-            <a:srgbClr val="F5F0FA"/>
-          </a:solidFill>
-          <a:ln>
-            <a:noFill/>
-          </a:ln>
-        </p:spPr>
-        <p:style>
-          <a:lnRef idx="1">
-            <a:schemeClr val="accent1"/>
-          </a:lnRef>
-          <a:fillRef idx="3">
-            <a:schemeClr val="accent1"/>
-          </a:fillRef>
-          <a:effectRef idx="2">
-            <a:schemeClr val="accent1"/>
-          </a:effectRef>
-          <a:fontRef idx="minor">
-            <a:schemeClr val="lt1"/>
-          </a:fontRef>
-        </p:style>
-        <p:txBody>
-          <a:bodyPr rtlCol="0" anchor="ctr"/>
-          <a:lstStyle/>
-          <a:p>
-            <a:pPr algn="ctr"/>
-          </a:p>
-        </p:txBody>
-      </p:sp>
-      <p:sp>
-        <p:nvSpPr>
-          <p:cNvPr id="21" name="TextBox 20"/>
-          <p:cNvSpPr txBox="1"/>
-          <p:nvPr/>
-        </p:nvSpPr>
-        <p:spPr>
-          <a:xfrm>
-            <a:off x="1097280" y="5532120"/>
-            <a:ext cx="10058400" cy="548640"/>
-          </a:xfrm>
-          <a:prstGeom prst="rect">
-            <a:avLst/>
-          </a:prstGeom>
-          <a:noFill/>
-        </p:spPr>
-        <p:txBody>
-          <a:bodyPr wrap="square">
-            <a:spAutoFit/>
-          </a:bodyPr>
-          <a:lstStyle/>
-          <a:p>
-            <a:pPr algn="l"/>
-            <a:r>
-              <a:rPr sz="1800" b="1">
-                <a:solidFill>
-                  <a:srgbClr val="FF0000"/>
-                </a:solidFill>
-              </a:rPr>
-              <a:t>Complete all materials → be assessment-ready</a:t>
-            </a:r>
-          </a:p>
-        </p:txBody>
-      </p:sp>
-      <p:sp>
-        <p:nvSpPr>
-          <p:cNvPr id="22" name="TextBox 21"/>
-          <p:cNvSpPr txBox="1"/>
-          <p:nvPr/>
-        </p:nvSpPr>
-        <p:spPr>
-          <a:xfrm>
-            <a:off x="11155680" y="6400800"/>
-            <a:ext cx="914400" cy="365760"/>
-          </a:xfrm>
-          <a:prstGeom prst="rect">
-            <a:avLst/>
-          </a:prstGeom>
-          <a:noFill/>
-        </p:spPr>
-        <p:txBody>
-          <a:bodyPr wrap="square">
-            <a:spAutoFit/>
-          </a:bodyPr>
-          <a:lstStyle/>
-          <a:p>
-            <a:pPr algn="r"/>
-            <a:r>
-              <a:rPr b="1">
-                <a:solidFill>
-                  <a:srgbClr val="666666"/>
-                </a:solidFill>
-              </a:rPr>
-              <a:t>7</a:t>
+              <a:t>6</a:t>
             </a:r>
           </a:p>
         </p:txBody>

--- a/Introduction_to_Reading_Assessment.pptx
+++ b/Introduction_to_Reading_Assessment.pptx
@@ -4687,7 +4687,7 @@
                   <a:srgbClr val="000000"/>
                 </a:solidFill>
               </a:rPr>
-              <a:t>Common Language in Abstracts</a:t>
+              <a:t>Reading Assessment: 6 Questions</a:t>
             </a:r>
           </a:p>
         </p:txBody>
@@ -4700,10 +4700,914 @@
         </p:nvSpPr>
         <p:spPr>
           <a:xfrm>
-            <a:off x="998220" y="1463040"/>
-            <a:ext cx="2377440" cy="2194560"/>
+            <a:off x="914400" y="1463040"/>
+            <a:ext cx="4846320" cy="914400"/>
           </a:xfrm>
           <a:prstGeom prst="roundRect">
+            <a:avLst/>
+          </a:prstGeom>
+          <a:solidFill>
+            <a:srgbClr val="F5F0FA"/>
+          </a:solidFill>
+          <a:ln>
+            <a:noFill/>
+          </a:ln>
+        </p:spPr>
+        <p:style>
+          <a:lnRef idx="1">
+            <a:schemeClr val="accent1"/>
+          </a:lnRef>
+          <a:fillRef idx="3">
+            <a:schemeClr val="accent1"/>
+          </a:fillRef>
+          <a:effectRef idx="2">
+            <a:schemeClr val="accent1"/>
+          </a:effectRef>
+          <a:fontRef idx="minor">
+            <a:schemeClr val="lt1"/>
+          </a:fontRef>
+        </p:style>
+        <p:txBody>
+          <a:bodyPr rtlCol="0" anchor="ctr"/>
+          <a:lstStyle/>
+          <a:p>
+            <a:pPr algn="ctr"/>
+          </a:p>
+        </p:txBody>
+      </p:sp>
+      <p:sp>
+        <p:nvSpPr>
+          <p:cNvPr id="5" name="TextBox 4"/>
+          <p:cNvSpPr txBox="1"/>
+          <p:nvPr/>
+        </p:nvSpPr>
+        <p:spPr>
+          <a:xfrm>
+            <a:off x="1097280" y="1554480"/>
+            <a:ext cx="822960" cy="731520"/>
+          </a:xfrm>
+          <a:prstGeom prst="rect">
+            <a:avLst/>
+          </a:prstGeom>
+          <a:noFill/>
+        </p:spPr>
+        <p:txBody>
+          <a:bodyPr wrap="square">
+            <a:spAutoFit/>
+          </a:bodyPr>
+          <a:lstStyle/>
+          <a:p>
+            <a:pPr algn="ctr"/>
+            <a:r>
+              <a:rPr b="1" sz="2400">
+                <a:solidFill>
+                  <a:srgbClr val="7C3A9E"/>
+                </a:solidFill>
+              </a:rPr>
+              <a:t>Q1</a:t>
+            </a:r>
+          </a:p>
+        </p:txBody>
+      </p:sp>
+      <p:sp>
+        <p:nvSpPr>
+          <p:cNvPr id="6" name="TextBox 5"/>
+          <p:cNvSpPr txBox="1"/>
+          <p:nvPr/>
+        </p:nvSpPr>
+        <p:spPr>
+          <a:xfrm>
+            <a:off x="2011680" y="1554480"/>
+            <a:ext cx="3566160" cy="457200"/>
+          </a:xfrm>
+          <a:prstGeom prst="rect">
+            <a:avLst/>
+          </a:prstGeom>
+          <a:noFill/>
+        </p:spPr>
+        <p:txBody>
+          <a:bodyPr wrap="square">
+            <a:spAutoFit/>
+          </a:bodyPr>
+          <a:lstStyle/>
+          <a:p>
+            <a:pPr algn="l"/>
+            <a:r>
+              <a:rPr b="1" sz="1800">
+                <a:solidFill>
+                  <a:srgbClr val="000000"/>
+                </a:solidFill>
+              </a:rPr>
+              <a:t>Significance</a:t>
+            </a:r>
+          </a:p>
+        </p:txBody>
+      </p:sp>
+      <p:sp>
+        <p:nvSpPr>
+          <p:cNvPr id="7" name="TextBox 6"/>
+          <p:cNvSpPr txBox="1"/>
+          <p:nvPr/>
+        </p:nvSpPr>
+        <p:spPr>
+          <a:xfrm>
+            <a:off x="2011680" y="1993392"/>
+            <a:ext cx="3566160" cy="365760"/>
+          </a:xfrm>
+          <a:prstGeom prst="rect">
+            <a:avLst/>
+          </a:prstGeom>
+          <a:noFill/>
+        </p:spPr>
+        <p:txBody>
+          <a:bodyPr wrap="square">
+            <a:spAutoFit/>
+          </a:bodyPr>
+          <a:lstStyle/>
+          <a:p>
+            <a:pPr algn="l"/>
+            <a:r>
+              <a:rPr b="1" sz="1400">
+                <a:solidFill>
+                  <a:srgbClr val="666666"/>
+                </a:solidFill>
+              </a:rPr>
+              <a:t>研究意义是什么？</a:t>
+            </a:r>
+          </a:p>
+        </p:txBody>
+      </p:sp>
+      <p:sp>
+        <p:nvSpPr>
+          <p:cNvPr id="8" name="Rounded Rectangle 7"/>
+          <p:cNvSpPr/>
+          <p:nvPr/>
+        </p:nvSpPr>
+        <p:spPr>
+          <a:xfrm>
+            <a:off x="914400" y="2560320"/>
+            <a:ext cx="4846320" cy="914400"/>
+          </a:xfrm>
+          <a:prstGeom prst="roundRect">
+            <a:avLst/>
+          </a:prstGeom>
+          <a:solidFill>
+            <a:srgbClr val="F5F0FA"/>
+          </a:solidFill>
+          <a:ln>
+            <a:noFill/>
+          </a:ln>
+        </p:spPr>
+        <p:style>
+          <a:lnRef idx="1">
+            <a:schemeClr val="accent1"/>
+          </a:lnRef>
+          <a:fillRef idx="3">
+            <a:schemeClr val="accent1"/>
+          </a:fillRef>
+          <a:effectRef idx="2">
+            <a:schemeClr val="accent1"/>
+          </a:effectRef>
+          <a:fontRef idx="minor">
+            <a:schemeClr val="lt1"/>
+          </a:fontRef>
+        </p:style>
+        <p:txBody>
+          <a:bodyPr rtlCol="0" anchor="ctr"/>
+          <a:lstStyle/>
+          <a:p>
+            <a:pPr algn="ctr"/>
+          </a:p>
+        </p:txBody>
+      </p:sp>
+      <p:sp>
+        <p:nvSpPr>
+          <p:cNvPr id="9" name="TextBox 8"/>
+          <p:cNvSpPr txBox="1"/>
+          <p:nvPr/>
+        </p:nvSpPr>
+        <p:spPr>
+          <a:xfrm>
+            <a:off x="1097280" y="2651760"/>
+            <a:ext cx="822960" cy="731520"/>
+          </a:xfrm>
+          <a:prstGeom prst="rect">
+            <a:avLst/>
+          </a:prstGeom>
+          <a:noFill/>
+        </p:spPr>
+        <p:txBody>
+          <a:bodyPr wrap="square">
+            <a:spAutoFit/>
+          </a:bodyPr>
+          <a:lstStyle/>
+          <a:p>
+            <a:pPr algn="ctr"/>
+            <a:r>
+              <a:rPr b="1" sz="2400">
+                <a:solidFill>
+                  <a:srgbClr val="502379"/>
+                </a:solidFill>
+              </a:rPr>
+              <a:t>Q2</a:t>
+            </a:r>
+          </a:p>
+        </p:txBody>
+      </p:sp>
+      <p:sp>
+        <p:nvSpPr>
+          <p:cNvPr id="10" name="TextBox 9"/>
+          <p:cNvSpPr txBox="1"/>
+          <p:nvPr/>
+        </p:nvSpPr>
+        <p:spPr>
+          <a:xfrm>
+            <a:off x="2011680" y="2651760"/>
+            <a:ext cx="3566160" cy="457200"/>
+          </a:xfrm>
+          <a:prstGeom prst="rect">
+            <a:avLst/>
+          </a:prstGeom>
+          <a:noFill/>
+        </p:spPr>
+        <p:txBody>
+          <a:bodyPr wrap="square">
+            <a:spAutoFit/>
+          </a:bodyPr>
+          <a:lstStyle/>
+          <a:p>
+            <a:pPr algn="l"/>
+            <a:r>
+              <a:rPr b="1" sz="1800">
+                <a:solidFill>
+                  <a:srgbClr val="000000"/>
+                </a:solidFill>
+              </a:rPr>
+              <a:t>Main Aim</a:t>
+            </a:r>
+          </a:p>
+        </p:txBody>
+      </p:sp>
+      <p:sp>
+        <p:nvSpPr>
+          <p:cNvPr id="11" name="TextBox 10"/>
+          <p:cNvSpPr txBox="1"/>
+          <p:nvPr/>
+        </p:nvSpPr>
+        <p:spPr>
+          <a:xfrm>
+            <a:off x="2011680" y="3090672"/>
+            <a:ext cx="3566160" cy="365760"/>
+          </a:xfrm>
+          <a:prstGeom prst="rect">
+            <a:avLst/>
+          </a:prstGeom>
+          <a:noFill/>
+        </p:spPr>
+        <p:txBody>
+          <a:bodyPr wrap="square">
+            <a:spAutoFit/>
+          </a:bodyPr>
+          <a:lstStyle/>
+          <a:p>
+            <a:pPr algn="l"/>
+            <a:r>
+              <a:rPr b="1" sz="1400">
+                <a:solidFill>
+                  <a:srgbClr val="666666"/>
+                </a:solidFill>
+              </a:rPr>
+              <a:t>研究目的是什么？</a:t>
+            </a:r>
+          </a:p>
+        </p:txBody>
+      </p:sp>
+      <p:sp>
+        <p:nvSpPr>
+          <p:cNvPr id="12" name="Rounded Rectangle 11"/>
+          <p:cNvSpPr/>
+          <p:nvPr/>
+        </p:nvSpPr>
+        <p:spPr>
+          <a:xfrm>
+            <a:off x="914400" y="3657600"/>
+            <a:ext cx="4846320" cy="914400"/>
+          </a:xfrm>
+          <a:prstGeom prst="roundRect">
+            <a:avLst/>
+          </a:prstGeom>
+          <a:solidFill>
+            <a:srgbClr val="F5F0FA"/>
+          </a:solidFill>
+          <a:ln>
+            <a:noFill/>
+          </a:ln>
+        </p:spPr>
+        <p:style>
+          <a:lnRef idx="1">
+            <a:schemeClr val="accent1"/>
+          </a:lnRef>
+          <a:fillRef idx="3">
+            <a:schemeClr val="accent1"/>
+          </a:fillRef>
+          <a:effectRef idx="2">
+            <a:schemeClr val="accent1"/>
+          </a:effectRef>
+          <a:fontRef idx="minor">
+            <a:schemeClr val="lt1"/>
+          </a:fontRef>
+        </p:style>
+        <p:txBody>
+          <a:bodyPr rtlCol="0" anchor="ctr"/>
+          <a:lstStyle/>
+          <a:p>
+            <a:pPr algn="ctr"/>
+          </a:p>
+        </p:txBody>
+      </p:sp>
+      <p:sp>
+        <p:nvSpPr>
+          <p:cNvPr id="13" name="TextBox 12"/>
+          <p:cNvSpPr txBox="1"/>
+          <p:nvPr/>
+        </p:nvSpPr>
+        <p:spPr>
+          <a:xfrm>
+            <a:off x="1097280" y="3749040"/>
+            <a:ext cx="822960" cy="731520"/>
+          </a:xfrm>
+          <a:prstGeom prst="rect">
+            <a:avLst/>
+          </a:prstGeom>
+          <a:noFill/>
+        </p:spPr>
+        <p:txBody>
+          <a:bodyPr wrap="square">
+            <a:spAutoFit/>
+          </a:bodyPr>
+          <a:lstStyle/>
+          <a:p>
+            <a:pPr algn="ctr"/>
+            <a:r>
+              <a:rPr b="1" sz="2400">
+                <a:solidFill>
+                  <a:srgbClr val="7C3A9E"/>
+                </a:solidFill>
+              </a:rPr>
+              <a:t>Q3</a:t>
+            </a:r>
+          </a:p>
+        </p:txBody>
+      </p:sp>
+      <p:sp>
+        <p:nvSpPr>
+          <p:cNvPr id="14" name="TextBox 13"/>
+          <p:cNvSpPr txBox="1"/>
+          <p:nvPr/>
+        </p:nvSpPr>
+        <p:spPr>
+          <a:xfrm>
+            <a:off x="2011680" y="3749040"/>
+            <a:ext cx="3566160" cy="457200"/>
+          </a:xfrm>
+          <a:prstGeom prst="rect">
+            <a:avLst/>
+          </a:prstGeom>
+          <a:noFill/>
+        </p:spPr>
+        <p:txBody>
+          <a:bodyPr wrap="square">
+            <a:spAutoFit/>
+          </a:bodyPr>
+          <a:lstStyle/>
+          <a:p>
+            <a:pPr algn="l"/>
+            <a:r>
+              <a:rPr b="1" sz="1800">
+                <a:solidFill>
+                  <a:srgbClr val="000000"/>
+                </a:solidFill>
+              </a:rPr>
+              <a:t>Method</a:t>
+            </a:r>
+          </a:p>
+        </p:txBody>
+      </p:sp>
+      <p:sp>
+        <p:nvSpPr>
+          <p:cNvPr id="15" name="TextBox 14"/>
+          <p:cNvSpPr txBox="1"/>
+          <p:nvPr/>
+        </p:nvSpPr>
+        <p:spPr>
+          <a:xfrm>
+            <a:off x="2011680" y="4187952"/>
+            <a:ext cx="3566160" cy="365760"/>
+          </a:xfrm>
+          <a:prstGeom prst="rect">
+            <a:avLst/>
+          </a:prstGeom>
+          <a:noFill/>
+        </p:spPr>
+        <p:txBody>
+          <a:bodyPr wrap="square">
+            <a:spAutoFit/>
+          </a:bodyPr>
+          <a:lstStyle/>
+          <a:p>
+            <a:pPr algn="l"/>
+            <a:r>
+              <a:rPr b="1" sz="1400">
+                <a:solidFill>
+                  <a:srgbClr val="666666"/>
+                </a:solidFill>
+              </a:rPr>
+              <a:t>研究怎么做的？</a:t>
+            </a:r>
+          </a:p>
+        </p:txBody>
+      </p:sp>
+      <p:sp>
+        <p:nvSpPr>
+          <p:cNvPr id="16" name="Rounded Rectangle 15"/>
+          <p:cNvSpPr/>
+          <p:nvPr/>
+        </p:nvSpPr>
+        <p:spPr>
+          <a:xfrm>
+            <a:off x="914400" y="4754880"/>
+            <a:ext cx="4846320" cy="914400"/>
+          </a:xfrm>
+          <a:prstGeom prst="roundRect">
+            <a:avLst/>
+          </a:prstGeom>
+          <a:solidFill>
+            <a:srgbClr val="F5F0FA"/>
+          </a:solidFill>
+          <a:ln>
+            <a:noFill/>
+          </a:ln>
+        </p:spPr>
+        <p:style>
+          <a:lnRef idx="1">
+            <a:schemeClr val="accent1"/>
+          </a:lnRef>
+          <a:fillRef idx="3">
+            <a:schemeClr val="accent1"/>
+          </a:fillRef>
+          <a:effectRef idx="2">
+            <a:schemeClr val="accent1"/>
+          </a:effectRef>
+          <a:fontRef idx="minor">
+            <a:schemeClr val="lt1"/>
+          </a:fontRef>
+        </p:style>
+        <p:txBody>
+          <a:bodyPr rtlCol="0" anchor="ctr"/>
+          <a:lstStyle/>
+          <a:p>
+            <a:pPr algn="ctr"/>
+          </a:p>
+        </p:txBody>
+      </p:sp>
+      <p:sp>
+        <p:nvSpPr>
+          <p:cNvPr id="17" name="TextBox 16"/>
+          <p:cNvSpPr txBox="1"/>
+          <p:nvPr/>
+        </p:nvSpPr>
+        <p:spPr>
+          <a:xfrm>
+            <a:off x="1097280" y="4846320"/>
+            <a:ext cx="822960" cy="731520"/>
+          </a:xfrm>
+          <a:prstGeom prst="rect">
+            <a:avLst/>
+          </a:prstGeom>
+          <a:noFill/>
+        </p:spPr>
+        <p:txBody>
+          <a:bodyPr wrap="square">
+            <a:spAutoFit/>
+          </a:bodyPr>
+          <a:lstStyle/>
+          <a:p>
+            <a:pPr algn="ctr"/>
+            <a:r>
+              <a:rPr b="1" sz="2400">
+                <a:solidFill>
+                  <a:srgbClr val="502379"/>
+                </a:solidFill>
+              </a:rPr>
+              <a:t>Q4</a:t>
+            </a:r>
+          </a:p>
+        </p:txBody>
+      </p:sp>
+      <p:sp>
+        <p:nvSpPr>
+          <p:cNvPr id="18" name="TextBox 17"/>
+          <p:cNvSpPr txBox="1"/>
+          <p:nvPr/>
+        </p:nvSpPr>
+        <p:spPr>
+          <a:xfrm>
+            <a:off x="2011680" y="4846320"/>
+            <a:ext cx="3566160" cy="457200"/>
+          </a:xfrm>
+          <a:prstGeom prst="rect">
+            <a:avLst/>
+          </a:prstGeom>
+          <a:noFill/>
+        </p:spPr>
+        <p:txBody>
+          <a:bodyPr wrap="square">
+            <a:spAutoFit/>
+          </a:bodyPr>
+          <a:lstStyle/>
+          <a:p>
+            <a:pPr algn="l"/>
+            <a:r>
+              <a:rPr b="1" sz="1800">
+                <a:solidFill>
+                  <a:srgbClr val="000000"/>
+                </a:solidFill>
+              </a:rPr>
+              <a:t>Findings</a:t>
+            </a:r>
+          </a:p>
+        </p:txBody>
+      </p:sp>
+      <p:sp>
+        <p:nvSpPr>
+          <p:cNvPr id="19" name="TextBox 18"/>
+          <p:cNvSpPr txBox="1"/>
+          <p:nvPr/>
+        </p:nvSpPr>
+        <p:spPr>
+          <a:xfrm>
+            <a:off x="2011680" y="5285232"/>
+            <a:ext cx="3566160" cy="365760"/>
+          </a:xfrm>
+          <a:prstGeom prst="rect">
+            <a:avLst/>
+          </a:prstGeom>
+          <a:noFill/>
+        </p:spPr>
+        <p:txBody>
+          <a:bodyPr wrap="square">
+            <a:spAutoFit/>
+          </a:bodyPr>
+          <a:lstStyle/>
+          <a:p>
+            <a:pPr algn="l"/>
+            <a:r>
+              <a:rPr b="1" sz="1400">
+                <a:solidFill>
+                  <a:srgbClr val="666666"/>
+                </a:solidFill>
+              </a:rPr>
+              <a:t>发现了什么？</a:t>
+            </a:r>
+          </a:p>
+        </p:txBody>
+      </p:sp>
+      <p:sp>
+        <p:nvSpPr>
+          <p:cNvPr id="20" name="Rounded Rectangle 19"/>
+          <p:cNvSpPr/>
+          <p:nvPr/>
+        </p:nvSpPr>
+        <p:spPr>
+          <a:xfrm>
+            <a:off x="6217920" y="1463040"/>
+            <a:ext cx="4846320" cy="1383533"/>
+          </a:xfrm>
+          <a:prstGeom prst="roundRect">
+            <a:avLst/>
+          </a:prstGeom>
+          <a:solidFill>
+            <a:srgbClr val="F5F0FA"/>
+          </a:solidFill>
+          <a:ln>
+            <a:noFill/>
+          </a:ln>
+        </p:spPr>
+        <p:style>
+          <a:lnRef idx="1">
+            <a:schemeClr val="accent1"/>
+          </a:lnRef>
+          <a:fillRef idx="3">
+            <a:schemeClr val="accent1"/>
+          </a:fillRef>
+          <a:effectRef idx="2">
+            <a:schemeClr val="accent1"/>
+          </a:effectRef>
+          <a:fontRef idx="minor">
+            <a:schemeClr val="lt1"/>
+          </a:fontRef>
+        </p:style>
+        <p:txBody>
+          <a:bodyPr rtlCol="0" anchor="ctr"/>
+          <a:lstStyle/>
+          <a:p>
+            <a:pPr algn="ctr"/>
+          </a:p>
+        </p:txBody>
+      </p:sp>
+      <p:sp>
+        <p:nvSpPr>
+          <p:cNvPr id="21" name="TextBox 20"/>
+          <p:cNvSpPr txBox="1"/>
+          <p:nvPr/>
+        </p:nvSpPr>
+        <p:spPr>
+          <a:xfrm>
+            <a:off x="6400800" y="1645920"/>
+            <a:ext cx="822960" cy="731520"/>
+          </a:xfrm>
+          <a:prstGeom prst="rect">
+            <a:avLst/>
+          </a:prstGeom>
+          <a:noFill/>
+        </p:spPr>
+        <p:txBody>
+          <a:bodyPr wrap="square">
+            <a:spAutoFit/>
+          </a:bodyPr>
+          <a:lstStyle/>
+          <a:p>
+            <a:pPr algn="ctr"/>
+            <a:r>
+              <a:rPr b="1" sz="2400">
+                <a:solidFill>
+                  <a:srgbClr val="E86A17"/>
+                </a:solidFill>
+              </a:rPr>
+              <a:t>Q5</a:t>
+            </a:r>
+          </a:p>
+        </p:txBody>
+      </p:sp>
+      <p:sp>
+        <p:nvSpPr>
+          <p:cNvPr id="22" name="TextBox 21"/>
+          <p:cNvSpPr txBox="1"/>
+          <p:nvPr/>
+        </p:nvSpPr>
+        <p:spPr>
+          <a:xfrm>
+            <a:off x="7315200" y="1645920"/>
+            <a:ext cx="3566160" cy="457200"/>
+          </a:xfrm>
+          <a:prstGeom prst="rect">
+            <a:avLst/>
+          </a:prstGeom>
+          <a:noFill/>
+        </p:spPr>
+        <p:txBody>
+          <a:bodyPr wrap="square">
+            <a:spAutoFit/>
+          </a:bodyPr>
+          <a:lstStyle/>
+          <a:p>
+            <a:pPr algn="l"/>
+            <a:r>
+              <a:rPr b="1" sz="1800">
+                <a:solidFill>
+                  <a:srgbClr val="000000"/>
+                </a:solidFill>
+              </a:rPr>
+              <a:t>Vocabulary</a:t>
+            </a:r>
+          </a:p>
+        </p:txBody>
+      </p:sp>
+      <p:sp>
+        <p:nvSpPr>
+          <p:cNvPr id="23" name="TextBox 22"/>
+          <p:cNvSpPr txBox="1"/>
+          <p:nvPr/>
+        </p:nvSpPr>
+        <p:spPr>
+          <a:xfrm>
+            <a:off x="7315200" y="2084832"/>
+            <a:ext cx="3566160" cy="365760"/>
+          </a:xfrm>
+          <a:prstGeom prst="rect">
+            <a:avLst/>
+          </a:prstGeom>
+          <a:noFill/>
+        </p:spPr>
+        <p:txBody>
+          <a:bodyPr wrap="square">
+            <a:spAutoFit/>
+          </a:bodyPr>
+          <a:lstStyle/>
+          <a:p>
+            <a:pPr algn="l"/>
+            <a:r>
+              <a:rPr b="1" sz="1400">
+                <a:solidFill>
+                  <a:srgbClr val="666666"/>
+                </a:solidFill>
+              </a:rPr>
+              <a:t>定义 → 文中找对应词</a:t>
+            </a:r>
+          </a:p>
+        </p:txBody>
+      </p:sp>
+      <p:sp>
+        <p:nvSpPr>
+          <p:cNvPr id="24" name="TextBox 23"/>
+          <p:cNvSpPr txBox="1"/>
+          <p:nvPr/>
+        </p:nvSpPr>
+        <p:spPr>
+          <a:xfrm>
+            <a:off x="7315200" y="2423160"/>
+            <a:ext cx="3566160" cy="365760"/>
+          </a:xfrm>
+          <a:prstGeom prst="rect">
+            <a:avLst/>
+          </a:prstGeom>
+          <a:noFill/>
+        </p:spPr>
+        <p:txBody>
+          <a:bodyPr wrap="square">
+            <a:spAutoFit/>
+          </a:bodyPr>
+          <a:lstStyle/>
+          <a:p>
+            <a:pPr algn="l"/>
+            <a:r>
+              <a:rPr b="1" sz="1200">
+                <a:solidFill>
+                  <a:srgbClr val="666666"/>
+                </a:solidFill>
+              </a:rPr>
+              <a:t>得分点：用自己的话改写</a:t>
+            </a:r>
+          </a:p>
+        </p:txBody>
+      </p:sp>
+      <p:sp>
+        <p:nvSpPr>
+          <p:cNvPr id="25" name="Rounded Rectangle 24"/>
+          <p:cNvSpPr/>
+          <p:nvPr/>
+        </p:nvSpPr>
+        <p:spPr>
+          <a:xfrm>
+            <a:off x="6217920" y="3108960"/>
+            <a:ext cx="4846320" cy="1383533"/>
+          </a:xfrm>
+          <a:prstGeom prst="roundRect">
+            <a:avLst/>
+          </a:prstGeom>
+          <a:solidFill>
+            <a:srgbClr val="F5F0FA"/>
+          </a:solidFill>
+          <a:ln>
+            <a:noFill/>
+          </a:ln>
+        </p:spPr>
+        <p:style>
+          <a:lnRef idx="1">
+            <a:schemeClr val="accent1"/>
+          </a:lnRef>
+          <a:fillRef idx="3">
+            <a:schemeClr val="accent1"/>
+          </a:fillRef>
+          <a:effectRef idx="2">
+            <a:schemeClr val="accent1"/>
+          </a:effectRef>
+          <a:fontRef idx="minor">
+            <a:schemeClr val="lt1"/>
+          </a:fontRef>
+        </p:style>
+        <p:txBody>
+          <a:bodyPr rtlCol="0" anchor="ctr"/>
+          <a:lstStyle/>
+          <a:p>
+            <a:pPr algn="ctr"/>
+          </a:p>
+        </p:txBody>
+      </p:sp>
+      <p:sp>
+        <p:nvSpPr>
+          <p:cNvPr id="26" name="TextBox 25"/>
+          <p:cNvSpPr txBox="1"/>
+          <p:nvPr/>
+        </p:nvSpPr>
+        <p:spPr>
+          <a:xfrm>
+            <a:off x="6400800" y="3291840"/>
+            <a:ext cx="822960" cy="731520"/>
+          </a:xfrm>
+          <a:prstGeom prst="rect">
+            <a:avLst/>
+          </a:prstGeom>
+          <a:noFill/>
+        </p:spPr>
+        <p:txBody>
+          <a:bodyPr wrap="square">
+            <a:spAutoFit/>
+          </a:bodyPr>
+          <a:lstStyle/>
+          <a:p>
+            <a:pPr algn="ctr"/>
+            <a:r>
+              <a:rPr b="1" sz="2400">
+                <a:solidFill>
+                  <a:srgbClr val="2E864B"/>
+                </a:solidFill>
+              </a:rPr>
+              <a:t>Q6</a:t>
+            </a:r>
+          </a:p>
+        </p:txBody>
+      </p:sp>
+      <p:sp>
+        <p:nvSpPr>
+          <p:cNvPr id="27" name="TextBox 26"/>
+          <p:cNvSpPr txBox="1"/>
+          <p:nvPr/>
+        </p:nvSpPr>
+        <p:spPr>
+          <a:xfrm>
+            <a:off x="7315200" y="3291840"/>
+            <a:ext cx="3566160" cy="457200"/>
+          </a:xfrm>
+          <a:prstGeom prst="rect">
+            <a:avLst/>
+          </a:prstGeom>
+          <a:noFill/>
+        </p:spPr>
+        <p:txBody>
+          <a:bodyPr wrap="square">
+            <a:spAutoFit/>
+          </a:bodyPr>
+          <a:lstStyle/>
+          <a:p>
+            <a:pPr algn="l"/>
+            <a:r>
+              <a:rPr b="1" sz="1800">
+                <a:solidFill>
+                  <a:srgbClr val="000000"/>
+                </a:solidFill>
+              </a:rPr>
+              <a:t>Reference</a:t>
+            </a:r>
+          </a:p>
+        </p:txBody>
+      </p:sp>
+      <p:sp>
+        <p:nvSpPr>
+          <p:cNvPr id="28" name="TextBox 27"/>
+          <p:cNvSpPr txBox="1"/>
+          <p:nvPr/>
+        </p:nvSpPr>
+        <p:spPr>
+          <a:xfrm>
+            <a:off x="7315200" y="3730752"/>
+            <a:ext cx="3566160" cy="365760"/>
+          </a:xfrm>
+          <a:prstGeom prst="rect">
+            <a:avLst/>
+          </a:prstGeom>
+          <a:noFill/>
+        </p:spPr>
+        <p:txBody>
+          <a:bodyPr wrap="square">
+            <a:spAutoFit/>
+          </a:bodyPr>
+          <a:lstStyle/>
+          <a:p>
+            <a:pPr algn="l"/>
+            <a:r>
+              <a:rPr b="1" sz="1400">
+                <a:solidFill>
+                  <a:srgbClr val="666666"/>
+                </a:solidFill>
+              </a:rPr>
+              <a:t>"it" / "this" 指什么？</a:t>
+            </a:r>
+          </a:p>
+        </p:txBody>
+      </p:sp>
+      <p:sp>
+        <p:nvSpPr>
+          <p:cNvPr id="29" name="Rectangle 28"/>
+          <p:cNvSpPr/>
+          <p:nvPr/>
+        </p:nvSpPr>
+        <p:spPr>
+          <a:xfrm>
+            <a:off x="5943600" y="1645920"/>
+            <a:ext cx="45720" cy="4114800"/>
+          </a:xfrm>
+          <a:prstGeom prst="rect">
             <a:avLst/>
           </a:prstGeom>
           <a:solidFill>
@@ -4737,14 +5641,14 @@
       </p:sp>
       <p:sp>
         <p:nvSpPr>
-          <p:cNvPr id="5" name="TextBox 4"/>
+          <p:cNvPr id="30" name="TextBox 29"/>
           <p:cNvSpPr txBox="1"/>
           <p:nvPr/>
         </p:nvSpPr>
         <p:spPr>
           <a:xfrm>
-            <a:off x="1089660" y="1645920"/>
-            <a:ext cx="2194560" cy="731520"/>
+            <a:off x="914400" y="5931000"/>
+            <a:ext cx="10058400" cy="365760"/>
           </a:xfrm>
           <a:prstGeom prst="rect">
             <a:avLst/>
@@ -4757,422 +5661,21 @@
           </a:bodyPr>
           <a:lstStyle/>
           <a:p>
-            <a:pPr algn="ctr"/>
-            <a:r>
-              <a:rPr b="1" sz="2400">
-                <a:solidFill>
-                  <a:srgbClr val="FFFFFF"/>
-                </a:solidFill>
-              </a:rPr>
-              <a:t>paper</a:t>
-            </a:r>
-          </a:p>
-        </p:txBody>
-      </p:sp>
-      <p:sp>
-        <p:nvSpPr>
-          <p:cNvPr id="6" name="TextBox 5"/>
-          <p:cNvSpPr txBox="1"/>
-          <p:nvPr/>
-        </p:nvSpPr>
-        <p:spPr>
-          <a:xfrm>
-            <a:off x="1089660" y="2555760"/>
-            <a:ext cx="2194560" cy="548640"/>
-          </a:xfrm>
-          <a:prstGeom prst="rect">
-            <a:avLst/>
-          </a:prstGeom>
-          <a:noFill/>
-        </p:spPr>
-        <p:txBody>
-          <a:bodyPr wrap="square">
-            <a:spAutoFit/>
-          </a:bodyPr>
-          <a:lstStyle/>
-          <a:p>
-            <a:pPr algn="ctr"/>
-            <a:r>
-              <a:rPr b="1" sz="2000">
-                <a:solidFill>
-                  <a:srgbClr val="DDDDFF"/>
-                </a:solidFill>
-              </a:rPr>
-              <a:t>499×</a:t>
-            </a:r>
-          </a:p>
-        </p:txBody>
-      </p:sp>
-      <p:sp>
-        <p:nvSpPr>
-          <p:cNvPr id="7" name="Rounded Rectangle 6"/>
-          <p:cNvSpPr/>
-          <p:nvPr/>
-        </p:nvSpPr>
-        <p:spPr>
-          <a:xfrm>
-            <a:off x="3604260" y="1463040"/>
-            <a:ext cx="2377440" cy="2194560"/>
-          </a:xfrm>
-          <a:prstGeom prst="roundRect">
-            <a:avLst/>
-          </a:prstGeom>
-          <a:solidFill>
-            <a:srgbClr val="502379"/>
-          </a:solidFill>
-          <a:ln>
-            <a:noFill/>
-          </a:ln>
-        </p:spPr>
-        <p:style>
-          <a:lnRef idx="1">
-            <a:schemeClr val="accent1"/>
-          </a:lnRef>
-          <a:fillRef idx="3">
-            <a:schemeClr val="accent1"/>
-          </a:fillRef>
-          <a:effectRef idx="2">
-            <a:schemeClr val="accent1"/>
-          </a:effectRef>
-          <a:fontRef idx="minor">
-            <a:schemeClr val="lt1"/>
-          </a:fontRef>
-        </p:style>
-        <p:txBody>
-          <a:bodyPr rtlCol="0" anchor="ctr"/>
-          <a:lstStyle/>
-          <a:p>
-            <a:pPr algn="ctr"/>
-          </a:p>
-        </p:txBody>
-      </p:sp>
-      <p:sp>
-        <p:nvSpPr>
-          <p:cNvPr id="8" name="TextBox 7"/>
-          <p:cNvSpPr txBox="1"/>
-          <p:nvPr/>
-        </p:nvSpPr>
-        <p:spPr>
-          <a:xfrm>
-            <a:off x="3695700" y="1645920"/>
-            <a:ext cx="2194560" cy="731520"/>
-          </a:xfrm>
-          <a:prstGeom prst="rect">
-            <a:avLst/>
-          </a:prstGeom>
-          <a:noFill/>
-        </p:spPr>
-        <p:txBody>
-          <a:bodyPr wrap="square">
-            <a:spAutoFit/>
-          </a:bodyPr>
-          <a:lstStyle/>
-          <a:p>
-            <a:pPr algn="ctr"/>
-            <a:r>
-              <a:rPr b="1" sz="2400">
-                <a:solidFill>
-                  <a:srgbClr val="FFFFFF"/>
-                </a:solidFill>
-              </a:rPr>
-              <a:t>study</a:t>
-            </a:r>
-          </a:p>
-        </p:txBody>
-      </p:sp>
-      <p:sp>
-        <p:nvSpPr>
-          <p:cNvPr id="9" name="TextBox 8"/>
-          <p:cNvSpPr txBox="1"/>
-          <p:nvPr/>
-        </p:nvSpPr>
-        <p:spPr>
-          <a:xfrm>
-            <a:off x="3695700" y="2555760"/>
-            <a:ext cx="2194560" cy="548640"/>
-          </a:xfrm>
-          <a:prstGeom prst="rect">
-            <a:avLst/>
-          </a:prstGeom>
-          <a:noFill/>
-        </p:spPr>
-        <p:txBody>
-          <a:bodyPr wrap="square">
-            <a:spAutoFit/>
-          </a:bodyPr>
-          <a:lstStyle/>
-          <a:p>
-            <a:pPr algn="ctr"/>
-            <a:r>
-              <a:rPr b="1" sz="2000">
-                <a:solidFill>
-                  <a:srgbClr val="DDDDFF"/>
-                </a:solidFill>
-              </a:rPr>
-              <a:t>170×</a:t>
-            </a:r>
-          </a:p>
-        </p:txBody>
-      </p:sp>
-      <p:sp>
-        <p:nvSpPr>
-          <p:cNvPr id="10" name="Rounded Rectangle 9"/>
-          <p:cNvSpPr/>
-          <p:nvPr/>
-        </p:nvSpPr>
-        <p:spPr>
-          <a:xfrm>
-            <a:off x="6210300" y="1463040"/>
-            <a:ext cx="2377440" cy="2194560"/>
-          </a:xfrm>
-          <a:prstGeom prst="roundRect">
-            <a:avLst/>
-          </a:prstGeom>
-          <a:solidFill>
-            <a:srgbClr val="7C3A9E"/>
-          </a:solidFill>
-          <a:ln>
-            <a:noFill/>
-          </a:ln>
-        </p:spPr>
-        <p:style>
-          <a:lnRef idx="1">
-            <a:schemeClr val="accent1"/>
-          </a:lnRef>
-          <a:fillRef idx="3">
-            <a:schemeClr val="accent1"/>
-          </a:fillRef>
-          <a:effectRef idx="2">
-            <a:schemeClr val="accent1"/>
-          </a:effectRef>
-          <a:fontRef idx="minor">
-            <a:schemeClr val="lt1"/>
-          </a:fontRef>
-        </p:style>
-        <p:txBody>
-          <a:bodyPr rtlCol="0" anchor="ctr"/>
-          <a:lstStyle/>
-          <a:p>
-            <a:pPr algn="ctr"/>
-          </a:p>
-        </p:txBody>
-      </p:sp>
-      <p:sp>
-        <p:nvSpPr>
-          <p:cNvPr id="11" name="TextBox 10"/>
-          <p:cNvSpPr txBox="1"/>
-          <p:nvPr/>
-        </p:nvSpPr>
-        <p:spPr>
-          <a:xfrm>
-            <a:off x="6301740" y="1645920"/>
-            <a:ext cx="2194560" cy="731520"/>
-          </a:xfrm>
-          <a:prstGeom prst="rect">
-            <a:avLst/>
-          </a:prstGeom>
-          <a:noFill/>
-        </p:spPr>
-        <p:txBody>
-          <a:bodyPr wrap="square">
-            <a:spAutoFit/>
-          </a:bodyPr>
-          <a:lstStyle/>
-          <a:p>
-            <a:pPr algn="ctr"/>
-            <a:r>
-              <a:rPr b="1" sz="2400">
-                <a:solidFill>
-                  <a:srgbClr val="FFFFFF"/>
-                </a:solidFill>
-              </a:rPr>
-              <a:t>research</a:t>
-            </a:r>
-          </a:p>
-        </p:txBody>
-      </p:sp>
-      <p:sp>
-        <p:nvSpPr>
-          <p:cNvPr id="12" name="TextBox 11"/>
-          <p:cNvSpPr txBox="1"/>
-          <p:nvPr/>
-        </p:nvSpPr>
-        <p:spPr>
-          <a:xfrm>
-            <a:off x="6301740" y="2555760"/>
-            <a:ext cx="2194560" cy="548640"/>
-          </a:xfrm>
-          <a:prstGeom prst="rect">
-            <a:avLst/>
-          </a:prstGeom>
-          <a:noFill/>
-        </p:spPr>
-        <p:txBody>
-          <a:bodyPr wrap="square">
-            <a:spAutoFit/>
-          </a:bodyPr>
-          <a:lstStyle/>
-          <a:p>
-            <a:pPr algn="ctr"/>
-            <a:r>
-              <a:rPr b="1" sz="2000">
-                <a:solidFill>
-                  <a:srgbClr val="DDDDFF"/>
-                </a:solidFill>
-              </a:rPr>
-              <a:t>154×</a:t>
-            </a:r>
-          </a:p>
-        </p:txBody>
-      </p:sp>
-      <p:sp>
-        <p:nvSpPr>
-          <p:cNvPr id="13" name="Rounded Rectangle 12"/>
-          <p:cNvSpPr/>
-          <p:nvPr/>
-        </p:nvSpPr>
-        <p:spPr>
-          <a:xfrm>
-            <a:off x="8816340" y="1463040"/>
-            <a:ext cx="2377440" cy="2194560"/>
-          </a:xfrm>
-          <a:prstGeom prst="roundRect">
-            <a:avLst/>
-          </a:prstGeom>
-          <a:solidFill>
-            <a:srgbClr val="502379"/>
-          </a:solidFill>
-          <a:ln>
-            <a:noFill/>
-          </a:ln>
-        </p:spPr>
-        <p:style>
-          <a:lnRef idx="1">
-            <a:schemeClr val="accent1"/>
-          </a:lnRef>
-          <a:fillRef idx="3">
-            <a:schemeClr val="accent1"/>
-          </a:fillRef>
-          <a:effectRef idx="2">
-            <a:schemeClr val="accent1"/>
-          </a:effectRef>
-          <a:fontRef idx="minor">
-            <a:schemeClr val="lt1"/>
-          </a:fontRef>
-        </p:style>
-        <p:txBody>
-          <a:bodyPr rtlCol="0" anchor="ctr"/>
-          <a:lstStyle/>
-          <a:p>
-            <a:pPr algn="ctr"/>
-          </a:p>
-        </p:txBody>
-      </p:sp>
-      <p:sp>
-        <p:nvSpPr>
-          <p:cNvPr id="14" name="TextBox 13"/>
-          <p:cNvSpPr txBox="1"/>
-          <p:nvPr/>
-        </p:nvSpPr>
-        <p:spPr>
-          <a:xfrm>
-            <a:off x="8907780" y="1645920"/>
-            <a:ext cx="2194560" cy="731520"/>
-          </a:xfrm>
-          <a:prstGeom prst="rect">
-            <a:avLst/>
-          </a:prstGeom>
-          <a:noFill/>
-        </p:spPr>
-        <p:txBody>
-          <a:bodyPr wrap="square">
-            <a:spAutoFit/>
-          </a:bodyPr>
-          <a:lstStyle/>
-          <a:p>
-            <a:pPr algn="ctr"/>
-            <a:r>
-              <a:rPr b="1" sz="2400">
-                <a:solidFill>
-                  <a:srgbClr val="FFFFFF"/>
-                </a:solidFill>
-              </a:rPr>
-              <a:t>work</a:t>
-            </a:r>
-          </a:p>
-        </p:txBody>
-      </p:sp>
-      <p:sp>
-        <p:nvSpPr>
-          <p:cNvPr id="15" name="TextBox 14"/>
-          <p:cNvSpPr txBox="1"/>
-          <p:nvPr/>
-        </p:nvSpPr>
-        <p:spPr>
-          <a:xfrm>
-            <a:off x="8907780" y="2555760"/>
-            <a:ext cx="2194560" cy="548640"/>
-          </a:xfrm>
-          <a:prstGeom prst="rect">
-            <a:avLst/>
-          </a:prstGeom>
-          <a:noFill/>
-        </p:spPr>
-        <p:txBody>
-          <a:bodyPr wrap="square">
-            <a:spAutoFit/>
-          </a:bodyPr>
-          <a:lstStyle/>
-          <a:p>
-            <a:pPr algn="ctr"/>
-            <a:r>
-              <a:rPr b="1" sz="2000">
-                <a:solidFill>
-                  <a:srgbClr val="DDDDFF"/>
-                </a:solidFill>
-              </a:rPr>
-              <a:t>111×</a:t>
-            </a:r>
-          </a:p>
-        </p:txBody>
-      </p:sp>
-      <p:sp>
-        <p:nvSpPr>
-          <p:cNvPr id="16" name="TextBox 15"/>
-          <p:cNvSpPr txBox="1"/>
-          <p:nvPr/>
-        </p:nvSpPr>
-        <p:spPr>
-          <a:xfrm>
-            <a:off x="914400" y="4206240"/>
-            <a:ext cx="10058400" cy="457200"/>
-          </a:xfrm>
-          <a:prstGeom prst="rect">
-            <a:avLst/>
-          </a:prstGeom>
-          <a:noFill/>
-        </p:spPr>
-        <p:txBody>
-          <a:bodyPr wrap="square">
-            <a:spAutoFit/>
-          </a:bodyPr>
-          <a:lstStyle/>
-          <a:p>
             <a:pPr algn="l"/>
             <a:r>
               <a:rPr b="1" sz="1400">
                 <a:solidFill>
-                  <a:srgbClr val="666666"/>
-                </a:solidFill>
-              </a:rPr>
-              <a:t>investigate · examine · analyse · indicate · suggest</a:t>
-            </a:r>
-          </a:p>
-        </p:txBody>
-      </p:sp>
-      <p:sp>
-        <p:nvSpPr>
-          <p:cNvPr id="17" name="TextBox 16"/>
+                  <a:srgbClr val="FF0000"/>
+                </a:solidFill>
+              </a:rPr>
+              <a:t>⚠ All answers must be PARAPHRASED — no copying</a:t>
+            </a:r>
+          </a:p>
+        </p:txBody>
+      </p:sp>
+      <p:sp>
+        <p:nvSpPr>
+          <p:cNvPr id="31" name="TextBox 30"/>
           <p:cNvSpPr txBox="1"/>
           <p:nvPr/>
         </p:nvSpPr>
